--- a/data-eng/decks/w4d2s2.pptx
+++ b/data-eng/decks/w4d2s2.pptx
@@ -3100,7 +3100,7 @@
       <p:grpSpPr/>
       <p:sp>
         <p:nvSpPr>
-          <p:cNvPr id="2" name="Oval 1"/>
+          <p:cNvPr id="2" name="deckgen:decor"/>
           <p:cNvSpPr/>
           <p:nvPr/>
         </p:nvSpPr>
@@ -3130,7 +3130,7 @@
       </p:sp>
       <p:sp>
         <p:nvSpPr>
-          <p:cNvPr id="3" name="Oval 2"/>
+          <p:cNvPr id="3" name="deckgen:decor"/>
           <p:cNvSpPr/>
           <p:nvPr/>
         </p:nvSpPr>
@@ -3160,7 +3160,7 @@
       </p:sp>
       <p:sp>
         <p:nvSpPr>
-          <p:cNvPr id="4" name="Oval 3"/>
+          <p:cNvPr id="4" name="deckgen:decor"/>
           <p:cNvSpPr/>
           <p:nvPr/>
         </p:nvSpPr>
@@ -3190,7 +3190,7 @@
       </p:sp>
       <p:sp>
         <p:nvSpPr>
-          <p:cNvPr id="5" name="Rectangle 4"/>
+          <p:cNvPr id="5" name="deckgen:decor"/>
           <p:cNvSpPr/>
           <p:nvPr/>
         </p:nvSpPr>
@@ -3220,7 +3220,7 @@
       </p:sp>
       <p:sp>
         <p:nvSpPr>
-          <p:cNvPr id="6" name="Oval 5"/>
+          <p:cNvPr id="6" name="deckgen:decor"/>
           <p:cNvSpPr/>
           <p:nvPr/>
         </p:nvSpPr>
@@ -3250,7 +3250,7 @@
       </p:sp>
       <p:sp>
         <p:nvSpPr>
-          <p:cNvPr id="7" name="Oval 6"/>
+          <p:cNvPr id="7" name="deckgen:decor"/>
           <p:cNvSpPr/>
           <p:nvPr/>
         </p:nvSpPr>
@@ -3280,7 +3280,7 @@
       </p:sp>
       <p:sp>
         <p:nvSpPr>
-          <p:cNvPr id="8" name="Oval 7"/>
+          <p:cNvPr id="8" name="deckgen:decor"/>
           <p:cNvSpPr/>
           <p:nvPr/>
         </p:nvSpPr>
@@ -3310,7 +3310,7 @@
       </p:sp>
       <p:sp>
         <p:nvSpPr>
-          <p:cNvPr id="9" name="Oval 8"/>
+          <p:cNvPr id="9" name="deckgen:decor"/>
           <p:cNvSpPr/>
           <p:nvPr/>
         </p:nvSpPr>
@@ -3340,7 +3340,7 @@
       </p:sp>
       <p:sp>
         <p:nvSpPr>
-          <p:cNvPr id="10" name="Rectangle 9"/>
+          <p:cNvPr id="10" name="deckgen:decor"/>
           <p:cNvSpPr/>
           <p:nvPr/>
         </p:nvSpPr>
@@ -3600,7 +3600,7 @@
       <p:grpSpPr/>
       <p:sp>
         <p:nvSpPr>
-          <p:cNvPr id="2" name="Oval 1"/>
+          <p:cNvPr id="2" name="deckgen:decor"/>
           <p:cNvSpPr/>
           <p:nvPr/>
         </p:nvSpPr>
@@ -3630,7 +3630,7 @@
       </p:sp>
       <p:sp>
         <p:nvSpPr>
-          <p:cNvPr id="3" name="Oval 2"/>
+          <p:cNvPr id="3" name="deckgen:decor"/>
           <p:cNvSpPr/>
           <p:nvPr/>
         </p:nvSpPr>
@@ -3660,7 +3660,7 @@
       </p:sp>
       <p:sp>
         <p:nvSpPr>
-          <p:cNvPr id="4" name="Oval 3"/>
+          <p:cNvPr id="4" name="deckgen:decor"/>
           <p:cNvSpPr/>
           <p:nvPr/>
         </p:nvSpPr>
@@ -4662,7 +4662,7 @@
       <p:grpSpPr/>
       <p:sp>
         <p:nvSpPr>
-          <p:cNvPr id="2" name="Oval 1"/>
+          <p:cNvPr id="2" name="deckgen:decor"/>
           <p:cNvSpPr/>
           <p:nvPr/>
         </p:nvSpPr>
@@ -4692,7 +4692,7 @@
       </p:sp>
       <p:sp>
         <p:nvSpPr>
-          <p:cNvPr id="3" name="Oval 2"/>
+          <p:cNvPr id="3" name="deckgen:decor"/>
           <p:cNvSpPr/>
           <p:nvPr/>
         </p:nvSpPr>
@@ -5469,7 +5469,7 @@
       <p:grpSpPr/>
       <p:sp>
         <p:nvSpPr>
-          <p:cNvPr id="2" name="Oval 1"/>
+          <p:cNvPr id="2" name="deckgen:decor"/>
           <p:cNvSpPr/>
           <p:nvPr/>
         </p:nvSpPr>
@@ -5499,7 +5499,7 @@
       </p:sp>
       <p:sp>
         <p:nvSpPr>
-          <p:cNvPr id="3" name="Oval 2"/>
+          <p:cNvPr id="3" name="deckgen:decor"/>
           <p:cNvSpPr/>
           <p:nvPr/>
         </p:nvSpPr>
@@ -5529,7 +5529,7 @@
       </p:sp>
       <p:sp>
         <p:nvSpPr>
-          <p:cNvPr id="4" name="Oval 3"/>
+          <p:cNvPr id="4" name="deckgen:decor"/>
           <p:cNvSpPr/>
           <p:nvPr/>
         </p:nvSpPr>
@@ -6460,7 +6460,7 @@
       <p:grpSpPr/>
       <p:sp>
         <p:nvSpPr>
-          <p:cNvPr id="2" name="Oval 1"/>
+          <p:cNvPr id="2" name="deckgen:decor"/>
           <p:cNvSpPr/>
           <p:nvPr/>
         </p:nvSpPr>
@@ -6490,7 +6490,7 @@
       </p:sp>
       <p:sp>
         <p:nvSpPr>
-          <p:cNvPr id="3" name="Oval 2"/>
+          <p:cNvPr id="3" name="deckgen:decor"/>
           <p:cNvSpPr/>
           <p:nvPr/>
         </p:nvSpPr>
@@ -6520,7 +6520,7 @@
       </p:sp>
       <p:sp>
         <p:nvSpPr>
-          <p:cNvPr id="4" name="Oval 3"/>
+          <p:cNvPr id="4" name="deckgen:decor"/>
           <p:cNvSpPr/>
           <p:nvPr/>
         </p:nvSpPr>
@@ -7599,7 +7599,7 @@
       <p:grpSpPr/>
       <p:sp>
         <p:nvSpPr>
-          <p:cNvPr id="2" name="Oval 1"/>
+          <p:cNvPr id="2" name="deckgen:decor"/>
           <p:cNvSpPr/>
           <p:nvPr/>
         </p:nvSpPr>
@@ -7629,7 +7629,7 @@
       </p:sp>
       <p:sp>
         <p:nvSpPr>
-          <p:cNvPr id="3" name="Oval 2"/>
+          <p:cNvPr id="3" name="deckgen:decor"/>
           <p:cNvSpPr/>
           <p:nvPr/>
         </p:nvSpPr>
@@ -7659,7 +7659,7 @@
       </p:sp>
       <p:sp>
         <p:nvSpPr>
-          <p:cNvPr id="4" name="Oval 3"/>
+          <p:cNvPr id="4" name="deckgen:decor"/>
           <p:cNvSpPr/>
           <p:nvPr/>
         </p:nvSpPr>
@@ -8228,7 +8228,7 @@
                 <a:ea typeface="Pretendard"/>
                 <a:cs typeface="Pretendard"/>
               </a:rPr>
-              <a:t>minio/minio</a:t>
+              <a:t>pgsty/minio</a:t>
             </a:r>
           </a:p>
         </p:txBody>
@@ -8528,7 +8528,7 @@
                 <a:ea typeface="Pretendard"/>
                 <a:cs typeface="Pretendard"/>
               </a:rPr>
-              <a:t>minio/mc</a:t>
+              <a:t>pgsty/mc</a:t>
             </a:r>
           </a:p>
         </p:txBody>
@@ -9456,7 +9456,7 @@
       <p:grpSpPr/>
       <p:sp>
         <p:nvSpPr>
-          <p:cNvPr id="2" name="Oval 1"/>
+          <p:cNvPr id="2" name="deckgen:decor"/>
           <p:cNvSpPr/>
           <p:nvPr/>
         </p:nvSpPr>
@@ -9486,7 +9486,7 @@
       </p:sp>
       <p:sp>
         <p:nvSpPr>
-          <p:cNvPr id="3" name="Oval 2"/>
+          <p:cNvPr id="3" name="deckgen:decor"/>
           <p:cNvSpPr/>
           <p:nvPr/>
         </p:nvSpPr>
@@ -9516,7 +9516,7 @@
       </p:sp>
       <p:sp>
         <p:nvSpPr>
-          <p:cNvPr id="4" name="Oval 3"/>
+          <p:cNvPr id="4" name="deckgen:decor"/>
           <p:cNvSpPr/>
           <p:nvPr/>
         </p:nvSpPr>
@@ -10549,7 +10549,7 @@
       <p:grpSpPr/>
       <p:sp>
         <p:nvSpPr>
-          <p:cNvPr id="2" name="Oval 1"/>
+          <p:cNvPr id="2" name="deckgen:decor"/>
           <p:cNvSpPr/>
           <p:nvPr/>
         </p:nvSpPr>
@@ -10579,7 +10579,7 @@
       </p:sp>
       <p:sp>
         <p:nvSpPr>
-          <p:cNvPr id="3" name="Oval 2"/>
+          <p:cNvPr id="3" name="deckgen:decor"/>
           <p:cNvSpPr/>
           <p:nvPr/>
         </p:nvSpPr>
@@ -10609,7 +10609,7 @@
       </p:sp>
       <p:sp>
         <p:nvSpPr>
-          <p:cNvPr id="4" name="Oval 3"/>
+          <p:cNvPr id="4" name="deckgen:decor"/>
           <p:cNvSpPr/>
           <p:nvPr/>
         </p:nvSpPr>
@@ -11576,7 +11576,7 @@
       <p:grpSpPr/>
       <p:sp>
         <p:nvSpPr>
-          <p:cNvPr id="2" name="Oval 1"/>
+          <p:cNvPr id="2" name="deckgen:decor"/>
           <p:cNvSpPr/>
           <p:nvPr/>
         </p:nvSpPr>
@@ -11606,7 +11606,7 @@
       </p:sp>
       <p:sp>
         <p:nvSpPr>
-          <p:cNvPr id="3" name="Oval 2"/>
+          <p:cNvPr id="3" name="deckgen:decor"/>
           <p:cNvSpPr/>
           <p:nvPr/>
         </p:nvSpPr>
@@ -11636,7 +11636,7 @@
       </p:sp>
       <p:sp>
         <p:nvSpPr>
-          <p:cNvPr id="4" name="Oval 3"/>
+          <p:cNvPr id="4" name="deckgen:decor"/>
           <p:cNvSpPr/>
           <p:nvPr/>
         </p:nvSpPr>
@@ -12841,7 +12841,7 @@
       <p:grpSpPr/>
       <p:sp>
         <p:nvSpPr>
-          <p:cNvPr id="2" name="Oval 1"/>
+          <p:cNvPr id="2" name="deckgen:decor"/>
           <p:cNvSpPr/>
           <p:nvPr/>
         </p:nvSpPr>
@@ -12871,7 +12871,7 @@
       </p:sp>
       <p:sp>
         <p:nvSpPr>
-          <p:cNvPr id="3" name="Oval 2"/>
+          <p:cNvPr id="3" name="deckgen:decor"/>
           <p:cNvSpPr/>
           <p:nvPr/>
         </p:nvSpPr>
@@ -12901,7 +12901,7 @@
       </p:sp>
       <p:sp>
         <p:nvSpPr>
-          <p:cNvPr id="4" name="Oval 3"/>
+          <p:cNvPr id="4" name="deckgen:decor"/>
           <p:cNvSpPr/>
           <p:nvPr/>
         </p:nvSpPr>
@@ -14055,7 +14055,7 @@
       <p:grpSpPr/>
       <p:sp>
         <p:nvSpPr>
-          <p:cNvPr id="2" name="Oval 1"/>
+          <p:cNvPr id="2" name="deckgen:decor"/>
           <p:cNvSpPr/>
           <p:nvPr/>
         </p:nvSpPr>
@@ -14085,7 +14085,7 @@
       </p:sp>
       <p:sp>
         <p:nvSpPr>
-          <p:cNvPr id="3" name="Oval 2"/>
+          <p:cNvPr id="3" name="deckgen:decor"/>
           <p:cNvSpPr/>
           <p:nvPr/>
         </p:nvSpPr>
@@ -14115,7 +14115,7 @@
       </p:sp>
       <p:sp>
         <p:nvSpPr>
-          <p:cNvPr id="4" name="Oval 3"/>
+          <p:cNvPr id="4" name="deckgen:decor"/>
           <p:cNvSpPr/>
           <p:nvPr/>
         </p:nvSpPr>

--- a/data-eng/decks/w4d2s2.pptx
+++ b/data-eng/decks/w4d2s2.pptx
@@ -3941,7 +3941,7 @@
                 <a:ea typeface="Pretendard"/>
                 <a:cs typeface="Pretendard"/>
               </a:rPr>
-              <a:t>docker compose ps 에 네 컨테이너가 모두 Up 이다</a:t>
+              <a:t>ps 에 네 컨테이너 Up · mc ls local 에 raw/ · warehouse/</a:t>
             </a:r>
           </a:p>
         </p:txBody>
@@ -4087,7 +4087,7 @@
                 <a:ea typeface="Pretendard"/>
                 <a:cs typeface="Pretendard"/>
               </a:rPr>
-              <a:t>mc mb 로 만든 warehouse 버킷이 있다</a:t>
+              <a:t>minio: 200 · defaults·overrides JSON · version 3.5.5</a:t>
             </a:r>
           </a:p>
         </p:txBody>
@@ -4233,7 +4233,7 @@
                 <a:ea typeface="Pretendard"/>
                 <a:cs typeface="Pretendard"/>
               </a:rPr>
-              <a:t>minio 200 · REST 카탈로그 JSON · Spark 버전이 각각 나온다</a:t>
+              <a:t>uri 가 /home/iceberg/iceberg_catalog.db (볼륨 자리)</a:t>
             </a:r>
           </a:p>
         </p:txBody>
@@ -4379,7 +4379,7 @@
                 <a:ea typeface="Pretendard"/>
                 <a:cs typeface="Pretendard"/>
               </a:rPr>
-              <a:t>spark-defaults.conf 에서 demo.uri · s3.endpoint 줄을 찾았다</a:t>
+              <a:t>SHOW CATALOGS 에 demo · spark_catalog 두 줄</a:t>
             </a:r>
           </a:p>
         </p:txBody>
@@ -4525,7 +4525,7 @@
                 <a:ea typeface="Pretendard"/>
                 <a:cs typeface="Pretendard"/>
               </a:rPr>
-              <a:t>SHOW CATALOGS 에 demo 가 보인다</a:t>
+              <a:t>rest 를 멈추면 UnknownHostException: rest — start 로 복구</a:t>
             </a:r>
           </a:p>
         </p:txBody>
@@ -5444,7 +5444,7 @@
                 <a:ea typeface="Pretendard"/>
                 <a:cs typeface="Pretendard"/>
               </a:rPr>
-              <a:t>spark-sql 프롬프트가 떠 있는 터미널</a:t>
+              <a:t>spark-sql ()&gt; 프롬프트가 떠 있는 터미널</a:t>
             </a:r>
           </a:p>
         </p:txBody>
@@ -5810,7 +5810,7 @@
                 <a:ea typeface="Pretendard"/>
                 <a:cs typeface="Pretendard"/>
               </a:rPr>
-              <a:t>docker-compose.yml 을 교체해 컨테이너 넷을 모두 Up 으로 만든다</a:t>
+              <a:t>compose 를 통째로 교체해 컨테이너 넷을 모두 Up 으로 만든다</a:t>
             </a:r>
           </a:p>
         </p:txBody>
@@ -5956,7 +5956,7 @@
                 <a:ea typeface="Pretendard"/>
                 <a:cs typeface="Pretendard"/>
               </a:rPr>
-              <a:t>curl 로 minio · REST 카탈로그가 살아 있는지 하나씩 확인한다</a:t>
+              <a:t>minio · REST 카탈로그 · Spark · 카탈로그 위치를 하나씩 확인한다</a:t>
             </a:r>
           </a:p>
         </p:txBody>
@@ -6248,7 +6248,7 @@
                 <a:ea typeface="Pretendard"/>
                 <a:cs typeface="Pretendard"/>
               </a:rPr>
-              <a:t>spark-sql 에서 SHOW CATALOGS 로 demo 를 확인한다</a:t>
+              <a:t>spark-sql 에서 demo 를 보고, 카탈로그를 멈춰 오류도 본다</a:t>
             </a:r>
           </a:p>
         </p:txBody>
@@ -6323,7 +6323,7 @@
                 <a:ea typeface="Pretendard"/>
                 <a:cs typeface="Pretendard"/>
               </a:rPr>
-              <a:t>이미지가 커서 첫 실행은 몇 분 걸립니다 — 그 사이 설정 파일을 읽어 둡니다</a:t>
+              <a:t>이미지를 안 받았으면 up 이 20분 넘게 걸립니다 — 미리 받아 두세요</a:t>
             </a:r>
           </a:p>
         </p:txBody>
@@ -6625,7 +6625,7 @@
                 <a:ea typeface="Pretendard"/>
                 <a:cs typeface="Pretendard"/>
               </a:rPr>
-              <a:t>다섯 단계 — 4-1 실습 폴더에서 이어서</a:t>
+              <a:t>다섯 단계 — 4-1 의 ~/lakehouse 에서 이어서</a:t>
             </a:r>
           </a:p>
         </p:txBody>
@@ -6696,7 +6696,7 @@
                 <a:ea typeface="Pretendard"/>
                 <a:cs typeface="Pretendard"/>
               </a:rPr>
-              <a:t>4-1 에서 docker compose up -d 로 minio 가 떠 있는 상태에서 시작합니다</a:t>
+              <a:t>4-1 에서 띄운 minio · mc 와 raw 버킷이 그대로 있는 상태에서 시작합니다</a:t>
             </a:r>
           </a:p>
         </p:txBody>
@@ -6842,7 +6842,7 @@
                 <a:ea typeface="Pretendard"/>
                 <a:cs typeface="Pretendard"/>
               </a:rPr>
-              <a:t>rest · spark-iceberg</a:t>
+              <a:t>히어독으로</a:t>
             </a:r>
           </a:p>
           <a:p>
@@ -6860,7 +6860,7 @@
                 <a:ea typeface="Pretendard"/>
                 <a:cs typeface="Pretendard"/>
               </a:rPr>
-              <a:t>추가</a:t>
+              <a:t>통째로 덮어쓰기</a:t>
             </a:r>
           </a:p>
         </p:txBody>
@@ -7006,7 +7006,25 @@
                 <a:ea typeface="Pretendard"/>
                 <a:cs typeface="Pretendard"/>
               </a:rPr>
-              <a:t>curl · 버전 · 로그</a:t>
+              <a:t>curl · 버전</a:t>
+            </a:r>
+          </a:p>
+          <a:p>
+            <a:pPr algn="ctr">
+              <a:lnSpc>
+                <a:spcPct val="146000"/>
+              </a:lnSpc>
+            </a:pPr>
+            <a:r>
+              <a:rPr sz="2100" b="0">
+                <a:solidFill>
+                  <a:srgbClr val="3D3D3D"/>
+                </a:solidFill>
+                <a:latin typeface="Pretendard"/>
+                <a:ea typeface="Pretendard"/>
+                <a:cs typeface="Pretendard"/>
+              </a:rPr>
+              <a:t>· uri · 로그</a:t>
             </a:r>
           </a:p>
         </p:txBody>
@@ -7764,7 +7782,7 @@
                 <a:ea typeface="Pretendard"/>
                 <a:cs typeface="Pretendard"/>
               </a:rPr>
-              <a:t>네 서비스 — 4-1 의 둘에 둘을 더한다</a:t>
+              <a:t>핵심 명령 — 교체하고, 띄우고, 버킷 보기</a:t>
             </a:r>
           </a:p>
         </p:txBody>
@@ -7808,7 +7826,7 @@
         <p:spPr>
           <a:xfrm>
             <a:off x="1143000" y="2781300"/>
-            <a:ext cx="3162300" cy="590550"/>
+            <a:ext cx="1185827" cy="571500"/>
           </a:xfrm>
           <a:prstGeom prst="rect">
             <a:avLst/>
@@ -7838,7 +7856,7 @@
         <p:spPr>
           <a:xfrm>
             <a:off x="1143000" y="2781300"/>
-            <a:ext cx="3162300" cy="590550"/>
+            <a:ext cx="1185827" cy="571500"/>
           </a:xfrm>
           <a:prstGeom prst="rect">
             <a:avLst/>
@@ -7857,7 +7875,7 @@
               </a:lnSpc>
             </a:pPr>
             <a:r>
-              <a:rPr sz="2025" b="1">
+              <a:rPr sz="1800" b="1">
                 <a:solidFill>
                   <a:srgbClr val="FFFFFF"/>
                 </a:solidFill>
@@ -7865,7 +7883,7 @@
                 <a:ea typeface="Pretendard"/>
                 <a:cs typeface="Pretendard"/>
               </a:rPr>
-              <a:t>서비스</a:t>
+              <a:t>교체</a:t>
             </a:r>
           </a:p>
         </p:txBody>
@@ -7878,301 +7896,11 @@
         </p:nvSpPr>
         <p:spPr>
           <a:xfrm>
-            <a:off x="4343400" y="2781300"/>
-            <a:ext cx="5082540" cy="590550"/>
-          </a:xfrm>
-          <a:prstGeom prst="rect">
-            <a:avLst/>
-          </a:prstGeom>
-          <a:solidFill>
-            <a:srgbClr val="1E5BC6"/>
-          </a:solidFill>
-          <a:ln>
-            <a:noFill/>
-          </a:ln>
-          <a:effectLst/>
-        </p:spPr>
-        <p:txBody>
-          <a:bodyPr rtlCol="0" anchor="ctr" wrap="square"/>
-          <a:lstStyle/>
-          <a:p>
-            <a:pPr algn="ctr"/>
-          </a:p>
-        </p:txBody>
-      </p:sp>
-      <p:sp>
-        <p:nvSpPr>
-          <p:cNvPr id="11" name="TextBox 10"/>
-          <p:cNvSpPr txBox="1"/>
-          <p:nvPr/>
-        </p:nvSpPr>
-        <p:spPr>
-          <a:xfrm>
-            <a:off x="4343400" y="2781300"/>
-            <a:ext cx="5082540" cy="590550"/>
-          </a:xfrm>
-          <a:prstGeom prst="rect">
-            <a:avLst/>
-          </a:prstGeom>
-          <a:noFill/>
-        </p:spPr>
-        <p:txBody>
-          <a:bodyPr wrap="square" lIns="0" rIns="0" tIns="0" bIns="0" anchor="ctr">
-            <a:spAutoFit/>
-          </a:bodyPr>
-          <a:lstStyle/>
-          <a:p>
-            <a:pPr algn="ctr">
-              <a:lnSpc>
-                <a:spcPct val="100000"/>
-              </a:lnSpc>
-            </a:pPr>
-            <a:r>
-              <a:rPr sz="2025" b="1">
-                <a:solidFill>
-                  <a:srgbClr val="FFFFFF"/>
-                </a:solidFill>
-                <a:latin typeface="Pretendard"/>
-                <a:ea typeface="Pretendard"/>
-                <a:cs typeface="Pretendard"/>
-              </a:rPr>
-              <a:t>이미지</a:t>
-            </a:r>
-          </a:p>
-        </p:txBody>
-      </p:sp>
-      <p:sp>
-        <p:nvSpPr>
-          <p:cNvPr id="12" name="Rectangle 11"/>
-          <p:cNvSpPr/>
-          <p:nvPr/>
-        </p:nvSpPr>
-        <p:spPr>
-          <a:xfrm>
-            <a:off x="9464040" y="2781300"/>
-            <a:ext cx="2522220" cy="590550"/>
-          </a:xfrm>
-          <a:prstGeom prst="rect">
-            <a:avLst/>
-          </a:prstGeom>
-          <a:solidFill>
-            <a:srgbClr val="1E5BC6"/>
-          </a:solidFill>
-          <a:ln>
-            <a:noFill/>
-          </a:ln>
-          <a:effectLst/>
-        </p:spPr>
-        <p:txBody>
-          <a:bodyPr rtlCol="0" anchor="ctr" wrap="square"/>
-          <a:lstStyle/>
-          <a:p>
-            <a:pPr algn="ctr"/>
-          </a:p>
-        </p:txBody>
-      </p:sp>
-      <p:sp>
-        <p:nvSpPr>
-          <p:cNvPr id="13" name="TextBox 12"/>
-          <p:cNvSpPr txBox="1"/>
-          <p:nvPr/>
-        </p:nvSpPr>
-        <p:spPr>
-          <a:xfrm>
-            <a:off x="9464040" y="2781300"/>
-            <a:ext cx="2522220" cy="590550"/>
-          </a:xfrm>
-          <a:prstGeom prst="rect">
-            <a:avLst/>
-          </a:prstGeom>
-          <a:noFill/>
-        </p:spPr>
-        <p:txBody>
-          <a:bodyPr wrap="square" lIns="0" rIns="0" tIns="0" bIns="0" anchor="ctr">
-            <a:spAutoFit/>
-          </a:bodyPr>
-          <a:lstStyle/>
-          <a:p>
-            <a:pPr algn="ctr">
-              <a:lnSpc>
-                <a:spcPct val="100000"/>
-              </a:lnSpc>
-            </a:pPr>
-            <a:r>
-              <a:rPr sz="2025" b="1">
-                <a:solidFill>
-                  <a:srgbClr val="FFFFFF"/>
-                </a:solidFill>
-                <a:latin typeface="Pretendard"/>
-                <a:ea typeface="Pretendard"/>
-                <a:cs typeface="Pretendard"/>
-              </a:rPr>
-              <a:t>포트</a:t>
-            </a:r>
-          </a:p>
-        </p:txBody>
-      </p:sp>
-      <p:sp>
-        <p:nvSpPr>
-          <p:cNvPr id="14" name="Rectangle 13"/>
-          <p:cNvSpPr/>
-          <p:nvPr/>
-        </p:nvSpPr>
-        <p:spPr>
-          <a:xfrm>
-            <a:off x="12024360" y="2781300"/>
-            <a:ext cx="5120640" cy="590550"/>
-          </a:xfrm>
-          <a:prstGeom prst="rect">
-            <a:avLst/>
-          </a:prstGeom>
-          <a:solidFill>
-            <a:srgbClr val="1E5BC6"/>
-          </a:solidFill>
-          <a:ln>
-            <a:noFill/>
-          </a:ln>
-          <a:effectLst/>
-        </p:spPr>
-        <p:txBody>
-          <a:bodyPr rtlCol="0" anchor="ctr" wrap="square"/>
-          <a:lstStyle/>
-          <a:p>
-            <a:pPr algn="ctr"/>
-          </a:p>
-        </p:txBody>
-      </p:sp>
-      <p:sp>
-        <p:nvSpPr>
-          <p:cNvPr id="15" name="TextBox 14"/>
-          <p:cNvSpPr txBox="1"/>
-          <p:nvPr/>
-        </p:nvSpPr>
-        <p:spPr>
-          <a:xfrm>
-            <a:off x="12024360" y="2781300"/>
-            <a:ext cx="5120640" cy="590550"/>
-          </a:xfrm>
-          <a:prstGeom prst="rect">
-            <a:avLst/>
-          </a:prstGeom>
-          <a:noFill/>
-        </p:spPr>
-        <p:txBody>
-          <a:bodyPr wrap="square" lIns="0" rIns="0" tIns="0" bIns="0" anchor="ctr">
-            <a:spAutoFit/>
-          </a:bodyPr>
-          <a:lstStyle/>
-          <a:p>
-            <a:pPr algn="ctr">
-              <a:lnSpc>
-                <a:spcPct val="100000"/>
-              </a:lnSpc>
-            </a:pPr>
-            <a:r>
-              <a:rPr sz="2025" b="1">
-                <a:solidFill>
-                  <a:srgbClr val="FFFFFF"/>
-                </a:solidFill>
-                <a:latin typeface="Pretendard"/>
-                <a:ea typeface="Pretendard"/>
-                <a:cs typeface="Pretendard"/>
-              </a:rPr>
-              <a:t>역할</a:t>
-            </a:r>
-          </a:p>
-        </p:txBody>
-      </p:sp>
-      <p:sp>
-        <p:nvSpPr>
-          <p:cNvPr id="16" name="Rounded Rectangle 15"/>
-          <p:cNvSpPr/>
-          <p:nvPr/>
-        </p:nvSpPr>
-        <p:spPr>
-          <a:xfrm>
-            <a:off x="1143000" y="3448050"/>
-            <a:ext cx="3162300" cy="647700"/>
-          </a:xfrm>
-          <a:prstGeom prst="roundRect">
-            <a:avLst>
-              <a:gd name="adj" fmla="val 5882"/>
-            </a:avLst>
-          </a:prstGeom>
-          <a:solidFill>
-            <a:srgbClr val="EDF3FD"/>
-          </a:solidFill>
-          <a:ln w="9525">
-            <a:solidFill>
-              <a:srgbClr val="BFD3F5"/>
-            </a:solidFill>
-          </a:ln>
-          <a:effectLst/>
-        </p:spPr>
-        <p:txBody>
-          <a:bodyPr rtlCol="0" anchor="ctr" wrap="square"/>
-          <a:lstStyle/>
-          <a:p>
-            <a:pPr algn="ctr"/>
-          </a:p>
-        </p:txBody>
-      </p:sp>
-      <p:sp>
-        <p:nvSpPr>
-          <p:cNvPr id="17" name="TextBox 16"/>
-          <p:cNvSpPr txBox="1"/>
-          <p:nvPr/>
-        </p:nvSpPr>
-        <p:spPr>
-          <a:xfrm>
-            <a:off x="1238250" y="3448050"/>
-            <a:ext cx="2971800" cy="647700"/>
-          </a:xfrm>
-          <a:prstGeom prst="rect">
-            <a:avLst/>
-          </a:prstGeom>
-          <a:noFill/>
-        </p:spPr>
-        <p:txBody>
-          <a:bodyPr wrap="square" lIns="0" rIns="0" tIns="0" bIns="0" anchor="ctr">
-            <a:spAutoFit/>
-          </a:bodyPr>
-          <a:lstStyle/>
-          <a:p>
-            <a:pPr algn="l">
-              <a:lnSpc>
-                <a:spcPct val="115000"/>
-              </a:lnSpc>
-            </a:pPr>
-            <a:r>
-              <a:rPr sz="1875" b="1">
-                <a:solidFill>
-                  <a:srgbClr val="0D2B5E"/>
-                </a:solidFill>
-                <a:latin typeface="Pretendard"/>
-                <a:ea typeface="Pretendard"/>
-                <a:cs typeface="Pretendard"/>
-              </a:rPr>
-              <a:t>minio</a:t>
-            </a:r>
-          </a:p>
-        </p:txBody>
-      </p:sp>
-      <p:sp>
-        <p:nvSpPr>
-          <p:cNvPr id="18" name="Rounded Rectangle 17"/>
-          <p:cNvSpPr/>
-          <p:nvPr/>
-        </p:nvSpPr>
-        <p:spPr>
-          <a:xfrm>
-            <a:off x="4343400" y="3448050"/>
-            <a:ext cx="5082540" cy="647700"/>
-          </a:xfrm>
-          <a:prstGeom prst="roundRect">
-            <a:avLst>
-              <a:gd name="adj" fmla="val 5882"/>
-            </a:avLst>
+            <a:off x="2328827" y="2781300"/>
+            <a:ext cx="14816173" cy="571500"/>
+          </a:xfrm>
+          <a:prstGeom prst="rect">
+            <a:avLst/>
           </a:prstGeom>
           <a:solidFill>
             <a:srgbClr val="FAFBFD"/>
@@ -8194,14 +7922,14 @@
       </p:sp>
       <p:sp>
         <p:nvSpPr>
-          <p:cNvPr id="19" name="TextBox 18"/>
-          <p:cNvSpPr txBox="1"/>
-          <p:nvPr/>
-        </p:nvSpPr>
-        <p:spPr>
-          <a:xfrm>
-            <a:off x="4438650" y="3448050"/>
-            <a:ext cx="4892040" cy="647700"/>
+          <p:cNvPr id="11" name="TextBox 10"/>
+          <p:cNvSpPr txBox="1"/>
+          <p:nvPr/>
+        </p:nvSpPr>
+        <p:spPr>
+          <a:xfrm>
+            <a:off x="2481227" y="2781300"/>
+            <a:ext cx="14511373" cy="571500"/>
           </a:xfrm>
           <a:prstGeom prst="rect">
             <a:avLst/>
@@ -8214,40 +7942,109 @@
           </a:bodyPr>
           <a:lstStyle/>
           <a:p>
+            <a:pPr algn="l">
+              <a:lnSpc>
+                <a:spcPct val="115000"/>
+              </a:lnSpc>
+            </a:pPr>
+            <a:r>
+              <a:rPr sz="1800" b="0">
+                <a:solidFill>
+                  <a:srgbClr val="3D3D3D"/>
+                </a:solidFill>
+                <a:latin typeface="Pretendard"/>
+                <a:ea typeface="Pretendard"/>
+                <a:cs typeface="Pretendard"/>
+              </a:rPr>
+              <a:t>cat &gt; docker-compose.yml &lt;&lt; 'EOF' … EOF</a:t>
+            </a:r>
+          </a:p>
+        </p:txBody>
+      </p:sp>
+      <p:sp>
+        <p:nvSpPr>
+          <p:cNvPr id="12" name="Rectangle 11"/>
+          <p:cNvSpPr/>
+          <p:nvPr/>
+        </p:nvSpPr>
+        <p:spPr>
+          <a:xfrm>
+            <a:off x="1143000" y="3429000"/>
+            <a:ext cx="1185827" cy="571500"/>
+          </a:xfrm>
+          <a:prstGeom prst="rect">
+            <a:avLst/>
+          </a:prstGeom>
+          <a:solidFill>
+            <a:srgbClr val="0D2B5E"/>
+          </a:solidFill>
+          <a:ln>
+            <a:noFill/>
+          </a:ln>
+          <a:effectLst/>
+        </p:spPr>
+        <p:txBody>
+          <a:bodyPr rtlCol="0" anchor="ctr" wrap="square"/>
+          <a:lstStyle/>
+          <a:p>
+            <a:pPr algn="ctr"/>
+          </a:p>
+        </p:txBody>
+      </p:sp>
+      <p:sp>
+        <p:nvSpPr>
+          <p:cNvPr id="13" name="TextBox 12"/>
+          <p:cNvSpPr txBox="1"/>
+          <p:nvPr/>
+        </p:nvSpPr>
+        <p:spPr>
+          <a:xfrm>
+            <a:off x="1143000" y="3429000"/>
+            <a:ext cx="1185827" cy="571500"/>
+          </a:xfrm>
+          <a:prstGeom prst="rect">
+            <a:avLst/>
+          </a:prstGeom>
+          <a:noFill/>
+        </p:spPr>
+        <p:txBody>
+          <a:bodyPr wrap="square" lIns="0" rIns="0" tIns="0" bIns="0" anchor="ctr">
+            <a:spAutoFit/>
+          </a:bodyPr>
+          <a:lstStyle/>
+          <a:p>
             <a:pPr algn="ctr">
               <a:lnSpc>
-                <a:spcPct val="115000"/>
-              </a:lnSpc>
-            </a:pPr>
-            <a:r>
-              <a:rPr sz="1875" b="0">
-                <a:solidFill>
-                  <a:srgbClr val="3D3D3D"/>
-                </a:solidFill>
-                <a:latin typeface="Pretendard"/>
-                <a:ea typeface="Pretendard"/>
-                <a:cs typeface="Pretendard"/>
-              </a:rPr>
-              <a:t>pgsty/minio</a:t>
-            </a:r>
-          </a:p>
-        </p:txBody>
-      </p:sp>
-      <p:sp>
-        <p:nvSpPr>
-          <p:cNvPr id="20" name="Rounded Rectangle 19"/>
-          <p:cNvSpPr/>
-          <p:nvPr/>
-        </p:nvSpPr>
-        <p:spPr>
-          <a:xfrm>
-            <a:off x="9464040" y="3448050"/>
-            <a:ext cx="2522220" cy="647700"/>
-          </a:xfrm>
-          <a:prstGeom prst="roundRect">
-            <a:avLst>
-              <a:gd name="adj" fmla="val 5882"/>
-            </a:avLst>
+                <a:spcPct val="100000"/>
+              </a:lnSpc>
+            </a:pPr>
+            <a:r>
+              <a:rPr sz="1800" b="1">
+                <a:solidFill>
+                  <a:srgbClr val="FFFFFF"/>
+                </a:solidFill>
+                <a:latin typeface="Pretendard"/>
+                <a:ea typeface="Pretendard"/>
+                <a:cs typeface="Pretendard"/>
+              </a:rPr>
+              <a:t>달라진 셋</a:t>
+            </a:r>
+          </a:p>
+        </p:txBody>
+      </p:sp>
+      <p:sp>
+        <p:nvSpPr>
+          <p:cNvPr id="14" name="Rectangle 13"/>
+          <p:cNvSpPr/>
+          <p:nvPr/>
+        </p:nvSpPr>
+        <p:spPr>
+          <a:xfrm>
+            <a:off x="2328827" y="3429000"/>
+            <a:ext cx="14816173" cy="571500"/>
+          </a:xfrm>
+          <a:prstGeom prst="rect">
+            <a:avLst/>
           </a:prstGeom>
           <a:solidFill>
             <a:srgbClr val="FAFBFD"/>
@@ -8269,14 +8066,14 @@
       </p:sp>
       <p:sp>
         <p:nvSpPr>
-          <p:cNvPr id="21" name="TextBox 20"/>
-          <p:cNvSpPr txBox="1"/>
-          <p:nvPr/>
-        </p:nvSpPr>
-        <p:spPr>
-          <a:xfrm>
-            <a:off x="9559290" y="3448050"/>
-            <a:ext cx="2331720" cy="647700"/>
+          <p:cNvPr id="15" name="TextBox 14"/>
+          <p:cNvSpPr txBox="1"/>
+          <p:nvPr/>
+        </p:nvSpPr>
+        <p:spPr>
+          <a:xfrm>
+            <a:off x="2481227" y="3429000"/>
+            <a:ext cx="14511373" cy="571500"/>
           </a:xfrm>
           <a:prstGeom prst="rect">
             <a:avLst/>
@@ -8289,40 +8086,109 @@
           </a:bodyPr>
           <a:lstStyle/>
           <a:p>
+            <a:pPr algn="l">
+              <a:lnSpc>
+                <a:spcPct val="115000"/>
+              </a:lnSpc>
+            </a:pPr>
+            <a:r>
+              <a:rPr sz="1800" b="0">
+                <a:solidFill>
+                  <a:srgbClr val="3D3D3D"/>
+                </a:solidFill>
+                <a:latin typeface="Pretendard"/>
+                <a:ea typeface="Pretendard"/>
+                <a:cs typeface="Pretendard"/>
+              </a:rPr>
+              <a:t>CATALOG_URI·볼륨 · MINIO_DOMAIN·별칭 · 태그 고정</a:t>
+            </a:r>
+          </a:p>
+        </p:txBody>
+      </p:sp>
+      <p:sp>
+        <p:nvSpPr>
+          <p:cNvPr id="16" name="Rectangle 15"/>
+          <p:cNvSpPr/>
+          <p:nvPr/>
+        </p:nvSpPr>
+        <p:spPr>
+          <a:xfrm>
+            <a:off x="1143000" y="4076700"/>
+            <a:ext cx="1185827" cy="571500"/>
+          </a:xfrm>
+          <a:prstGeom prst="rect">
+            <a:avLst/>
+          </a:prstGeom>
+          <a:solidFill>
+            <a:srgbClr val="0D2B5E"/>
+          </a:solidFill>
+          <a:ln>
+            <a:noFill/>
+          </a:ln>
+          <a:effectLst/>
+        </p:spPr>
+        <p:txBody>
+          <a:bodyPr rtlCol="0" anchor="ctr" wrap="square"/>
+          <a:lstStyle/>
+          <a:p>
+            <a:pPr algn="ctr"/>
+          </a:p>
+        </p:txBody>
+      </p:sp>
+      <p:sp>
+        <p:nvSpPr>
+          <p:cNvPr id="17" name="TextBox 16"/>
+          <p:cNvSpPr txBox="1"/>
+          <p:nvPr/>
+        </p:nvSpPr>
+        <p:spPr>
+          <a:xfrm>
+            <a:off x="1143000" y="4076700"/>
+            <a:ext cx="1185827" cy="571500"/>
+          </a:xfrm>
+          <a:prstGeom prst="rect">
+            <a:avLst/>
+          </a:prstGeom>
+          <a:noFill/>
+        </p:spPr>
+        <p:txBody>
+          <a:bodyPr wrap="square" lIns="0" rIns="0" tIns="0" bIns="0" anchor="ctr">
+            <a:spAutoFit/>
+          </a:bodyPr>
+          <a:lstStyle/>
+          <a:p>
             <a:pPr algn="ctr">
               <a:lnSpc>
-                <a:spcPct val="115000"/>
-              </a:lnSpc>
-            </a:pPr>
-            <a:r>
-              <a:rPr sz="1875" b="0">
-                <a:solidFill>
-                  <a:srgbClr val="3D3D3D"/>
-                </a:solidFill>
-                <a:latin typeface="Pretendard"/>
-                <a:ea typeface="Pretendard"/>
-                <a:cs typeface="Pretendard"/>
-              </a:rPr>
-              <a:t>9000 · 9001</a:t>
-            </a:r>
-          </a:p>
-        </p:txBody>
-      </p:sp>
-      <p:sp>
-        <p:nvSpPr>
-          <p:cNvPr id="22" name="Rounded Rectangle 21"/>
-          <p:cNvSpPr/>
-          <p:nvPr/>
-        </p:nvSpPr>
-        <p:spPr>
-          <a:xfrm>
-            <a:off x="12024360" y="3448050"/>
-            <a:ext cx="5120640" cy="647700"/>
-          </a:xfrm>
-          <a:prstGeom prst="roundRect">
-            <a:avLst>
-              <a:gd name="adj" fmla="val 5882"/>
-            </a:avLst>
+                <a:spcPct val="100000"/>
+              </a:lnSpc>
+            </a:pPr>
+            <a:r>
+              <a:rPr sz="1800" b="1">
+                <a:solidFill>
+                  <a:srgbClr val="FFFFFF"/>
+                </a:solidFill>
+                <a:latin typeface="Pretendard"/>
+                <a:ea typeface="Pretendard"/>
+                <a:cs typeface="Pretendard"/>
+              </a:rPr>
+              <a:t>띄우기</a:t>
+            </a:r>
+          </a:p>
+        </p:txBody>
+      </p:sp>
+      <p:sp>
+        <p:nvSpPr>
+          <p:cNvPr id="18" name="Rectangle 17"/>
+          <p:cNvSpPr/>
+          <p:nvPr/>
+        </p:nvSpPr>
+        <p:spPr>
+          <a:xfrm>
+            <a:off x="2328827" y="4076700"/>
+            <a:ext cx="14816173" cy="571500"/>
+          </a:xfrm>
+          <a:prstGeom prst="rect">
+            <a:avLst/>
           </a:prstGeom>
           <a:solidFill>
             <a:srgbClr val="FAFBFD"/>
@@ -8344,14 +8210,14 @@
       </p:sp>
       <p:sp>
         <p:nvSpPr>
-          <p:cNvPr id="23" name="TextBox 22"/>
-          <p:cNvSpPr txBox="1"/>
-          <p:nvPr/>
-        </p:nvSpPr>
-        <p:spPr>
-          <a:xfrm>
-            <a:off x="12119610" y="3448050"/>
-            <a:ext cx="4930140" cy="647700"/>
+          <p:cNvPr id="19" name="TextBox 18"/>
+          <p:cNvSpPr txBox="1"/>
+          <p:nvPr/>
+        </p:nvSpPr>
+        <p:spPr>
+          <a:xfrm>
+            <a:off x="2481227" y="4076700"/>
+            <a:ext cx="14511373" cy="571500"/>
           </a:xfrm>
           <a:prstGeom prst="rect">
             <a:avLst/>
@@ -8364,115 +8230,109 @@
           </a:bodyPr>
           <a:lstStyle/>
           <a:p>
+            <a:pPr algn="l">
+              <a:lnSpc>
+                <a:spcPct val="115000"/>
+              </a:lnSpc>
+            </a:pPr>
+            <a:r>
+              <a:rPr sz="1800" b="0">
+                <a:solidFill>
+                  <a:srgbClr val="3D3D3D"/>
+                </a:solidFill>
+                <a:latin typeface="Pretendard"/>
+                <a:ea typeface="Pretendard"/>
+                <a:cs typeface="Pretendard"/>
+              </a:rPr>
+              <a:t>mkdir -p scripts → docker compose up -d</a:t>
+            </a:r>
+          </a:p>
+        </p:txBody>
+      </p:sp>
+      <p:sp>
+        <p:nvSpPr>
+          <p:cNvPr id="20" name="Rectangle 19"/>
+          <p:cNvSpPr/>
+          <p:nvPr/>
+        </p:nvSpPr>
+        <p:spPr>
+          <a:xfrm>
+            <a:off x="1143000" y="4724400"/>
+            <a:ext cx="1185827" cy="571500"/>
+          </a:xfrm>
+          <a:prstGeom prst="rect">
+            <a:avLst/>
+          </a:prstGeom>
+          <a:solidFill>
+            <a:srgbClr val="0D2B5E"/>
+          </a:solidFill>
+          <a:ln>
+            <a:noFill/>
+          </a:ln>
+          <a:effectLst/>
+        </p:spPr>
+        <p:txBody>
+          <a:bodyPr rtlCol="0" anchor="ctr" wrap="square"/>
+          <a:lstStyle/>
+          <a:p>
+            <a:pPr algn="ctr"/>
+          </a:p>
+        </p:txBody>
+      </p:sp>
+      <p:sp>
+        <p:nvSpPr>
+          <p:cNvPr id="21" name="TextBox 20"/>
+          <p:cNvSpPr txBox="1"/>
+          <p:nvPr/>
+        </p:nvSpPr>
+        <p:spPr>
+          <a:xfrm>
+            <a:off x="1143000" y="4724400"/>
+            <a:ext cx="1185827" cy="571500"/>
+          </a:xfrm>
+          <a:prstGeom prst="rect">
+            <a:avLst/>
+          </a:prstGeom>
+          <a:noFill/>
+        </p:spPr>
+        <p:txBody>
+          <a:bodyPr wrap="square" lIns="0" rIns="0" tIns="0" bIns="0" anchor="ctr">
+            <a:spAutoFit/>
+          </a:bodyPr>
+          <a:lstStyle/>
+          <a:p>
             <a:pPr algn="ctr">
               <a:lnSpc>
-                <a:spcPct val="115000"/>
-              </a:lnSpc>
-            </a:pPr>
-            <a:r>
-              <a:rPr sz="1875" b="0">
-                <a:solidFill>
-                  <a:srgbClr val="3D3D3D"/>
-                </a:solidFill>
-                <a:latin typeface="Pretendard"/>
-                <a:ea typeface="Pretendard"/>
-                <a:cs typeface="Pretendard"/>
-              </a:rPr>
-              <a:t>오브젝트 스토리지</a:t>
-            </a:r>
-          </a:p>
-        </p:txBody>
-      </p:sp>
-      <p:sp>
-        <p:nvSpPr>
-          <p:cNvPr id="24" name="Rounded Rectangle 23"/>
-          <p:cNvSpPr/>
-          <p:nvPr/>
-        </p:nvSpPr>
-        <p:spPr>
-          <a:xfrm>
-            <a:off x="1143000" y="4171950"/>
-            <a:ext cx="3162300" cy="647700"/>
-          </a:xfrm>
-          <a:prstGeom prst="roundRect">
-            <a:avLst>
-              <a:gd name="adj" fmla="val 5882"/>
-            </a:avLst>
-          </a:prstGeom>
-          <a:solidFill>
-            <a:srgbClr val="EDF3FD"/>
-          </a:solidFill>
-          <a:ln w="9525">
-            <a:solidFill>
-              <a:srgbClr val="BFD3F5"/>
-            </a:solidFill>
-          </a:ln>
-          <a:effectLst/>
-        </p:spPr>
-        <p:txBody>
-          <a:bodyPr rtlCol="0" anchor="ctr" wrap="square"/>
-          <a:lstStyle/>
-          <a:p>
-            <a:pPr algn="ctr"/>
-          </a:p>
-        </p:txBody>
-      </p:sp>
-      <p:sp>
-        <p:nvSpPr>
-          <p:cNvPr id="25" name="TextBox 24"/>
-          <p:cNvSpPr txBox="1"/>
-          <p:nvPr/>
-        </p:nvSpPr>
-        <p:spPr>
-          <a:xfrm>
-            <a:off x="1238250" y="4171950"/>
-            <a:ext cx="2971800" cy="647700"/>
-          </a:xfrm>
-          <a:prstGeom prst="rect">
-            <a:avLst/>
-          </a:prstGeom>
-          <a:noFill/>
-        </p:spPr>
-        <p:txBody>
-          <a:bodyPr wrap="square" lIns="0" rIns="0" tIns="0" bIns="0" anchor="ctr">
-            <a:spAutoFit/>
-          </a:bodyPr>
-          <a:lstStyle/>
-          <a:p>
-            <a:pPr algn="l">
-              <a:lnSpc>
-                <a:spcPct val="115000"/>
-              </a:lnSpc>
-            </a:pPr>
-            <a:r>
-              <a:rPr sz="1875" b="1">
-                <a:solidFill>
-                  <a:srgbClr val="0D2B5E"/>
-                </a:solidFill>
-                <a:latin typeface="Pretendard"/>
-                <a:ea typeface="Pretendard"/>
-                <a:cs typeface="Pretendard"/>
-              </a:rPr>
-              <a:t>mc</a:t>
-            </a:r>
-          </a:p>
-        </p:txBody>
-      </p:sp>
-      <p:sp>
-        <p:nvSpPr>
-          <p:cNvPr id="26" name="Rounded Rectangle 25"/>
-          <p:cNvSpPr/>
-          <p:nvPr/>
-        </p:nvSpPr>
-        <p:spPr>
-          <a:xfrm>
-            <a:off x="4343400" y="4171950"/>
-            <a:ext cx="5082540" cy="647700"/>
-          </a:xfrm>
-          <a:prstGeom prst="roundRect">
-            <a:avLst>
-              <a:gd name="adj" fmla="val 5882"/>
-            </a:avLst>
+                <a:spcPct val="100000"/>
+              </a:lnSpc>
+            </a:pPr>
+            <a:r>
+              <a:rPr sz="1800" b="1">
+                <a:solidFill>
+                  <a:srgbClr val="FFFFFF"/>
+                </a:solidFill>
+                <a:latin typeface="Pretendard"/>
+                <a:ea typeface="Pretendard"/>
+                <a:cs typeface="Pretendard"/>
+              </a:rPr>
+              <a:t>상태</a:t>
+            </a:r>
+          </a:p>
+        </p:txBody>
+      </p:sp>
+      <p:sp>
+        <p:nvSpPr>
+          <p:cNvPr id="22" name="Rectangle 21"/>
+          <p:cNvSpPr/>
+          <p:nvPr/>
+        </p:nvSpPr>
+        <p:spPr>
+          <a:xfrm>
+            <a:off x="2328827" y="4724400"/>
+            <a:ext cx="14816173" cy="571500"/>
+          </a:xfrm>
+          <a:prstGeom prst="rect">
+            <a:avLst/>
           </a:prstGeom>
           <a:solidFill>
             <a:srgbClr val="FAFBFD"/>
@@ -8494,14 +8354,14 @@
       </p:sp>
       <p:sp>
         <p:nvSpPr>
-          <p:cNvPr id="27" name="TextBox 26"/>
-          <p:cNvSpPr txBox="1"/>
-          <p:nvPr/>
-        </p:nvSpPr>
-        <p:spPr>
-          <a:xfrm>
-            <a:off x="4438650" y="4171950"/>
-            <a:ext cx="4892040" cy="647700"/>
+          <p:cNvPr id="23" name="TextBox 22"/>
+          <p:cNvSpPr txBox="1"/>
+          <p:nvPr/>
+        </p:nvSpPr>
+        <p:spPr>
+          <a:xfrm>
+            <a:off x="2481227" y="4724400"/>
+            <a:ext cx="14511373" cy="571500"/>
           </a:xfrm>
           <a:prstGeom prst="rect">
             <a:avLst/>
@@ -8514,40 +8374,109 @@
           </a:bodyPr>
           <a:lstStyle/>
           <a:p>
+            <a:pPr algn="l">
+              <a:lnSpc>
+                <a:spcPct val="115000"/>
+              </a:lnSpc>
+            </a:pPr>
+            <a:r>
+              <a:rPr sz="1800" b="0">
+                <a:solidFill>
+                  <a:srgbClr val="3D3D3D"/>
+                </a:solidFill>
+                <a:latin typeface="Pretendard"/>
+                <a:ea typeface="Pretendard"/>
+                <a:cs typeface="Pretendard"/>
+              </a:rPr>
+              <a:t>docker compose ps</a:t>
+            </a:r>
+          </a:p>
+        </p:txBody>
+      </p:sp>
+      <p:sp>
+        <p:nvSpPr>
+          <p:cNvPr id="24" name="Rectangle 23"/>
+          <p:cNvSpPr/>
+          <p:nvPr/>
+        </p:nvSpPr>
+        <p:spPr>
+          <a:xfrm>
+            <a:off x="1143000" y="5372100"/>
+            <a:ext cx="1185827" cy="571500"/>
+          </a:xfrm>
+          <a:prstGeom prst="rect">
+            <a:avLst/>
+          </a:prstGeom>
+          <a:solidFill>
+            <a:srgbClr val="0D2B5E"/>
+          </a:solidFill>
+          <a:ln>
+            <a:noFill/>
+          </a:ln>
+          <a:effectLst/>
+        </p:spPr>
+        <p:txBody>
+          <a:bodyPr rtlCol="0" anchor="ctr" wrap="square"/>
+          <a:lstStyle/>
+          <a:p>
+            <a:pPr algn="ctr"/>
+          </a:p>
+        </p:txBody>
+      </p:sp>
+      <p:sp>
+        <p:nvSpPr>
+          <p:cNvPr id="25" name="TextBox 24"/>
+          <p:cNvSpPr txBox="1"/>
+          <p:nvPr/>
+        </p:nvSpPr>
+        <p:spPr>
+          <a:xfrm>
+            <a:off x="1143000" y="5372100"/>
+            <a:ext cx="1185827" cy="571500"/>
+          </a:xfrm>
+          <a:prstGeom prst="rect">
+            <a:avLst/>
+          </a:prstGeom>
+          <a:noFill/>
+        </p:spPr>
+        <p:txBody>
+          <a:bodyPr wrap="square" lIns="0" rIns="0" tIns="0" bIns="0" anchor="ctr">
+            <a:spAutoFit/>
+          </a:bodyPr>
+          <a:lstStyle/>
+          <a:p>
             <a:pPr algn="ctr">
               <a:lnSpc>
-                <a:spcPct val="115000"/>
-              </a:lnSpc>
-            </a:pPr>
-            <a:r>
-              <a:rPr sz="1875" b="0">
-                <a:solidFill>
-                  <a:srgbClr val="3D3D3D"/>
-                </a:solidFill>
-                <a:latin typeface="Pretendard"/>
-                <a:ea typeface="Pretendard"/>
-                <a:cs typeface="Pretendard"/>
-              </a:rPr>
-              <a:t>pgsty/mc</a:t>
-            </a:r>
-          </a:p>
-        </p:txBody>
-      </p:sp>
-      <p:sp>
-        <p:nvSpPr>
-          <p:cNvPr id="28" name="Rounded Rectangle 27"/>
-          <p:cNvSpPr/>
-          <p:nvPr/>
-        </p:nvSpPr>
-        <p:spPr>
-          <a:xfrm>
-            <a:off x="9464040" y="4171950"/>
-            <a:ext cx="2522220" cy="647700"/>
-          </a:xfrm>
-          <a:prstGeom prst="roundRect">
-            <a:avLst>
-              <a:gd name="adj" fmla="val 5882"/>
-            </a:avLst>
+                <a:spcPct val="100000"/>
+              </a:lnSpc>
+            </a:pPr>
+            <a:r>
+              <a:rPr sz="1800" b="1">
+                <a:solidFill>
+                  <a:srgbClr val="FFFFFF"/>
+                </a:solidFill>
+                <a:latin typeface="Pretendard"/>
+                <a:ea typeface="Pretendard"/>
+                <a:cs typeface="Pretendard"/>
+              </a:rPr>
+              <a:t>버킷</a:t>
+            </a:r>
+          </a:p>
+        </p:txBody>
+      </p:sp>
+      <p:sp>
+        <p:nvSpPr>
+          <p:cNvPr id="26" name="Rectangle 25"/>
+          <p:cNvSpPr/>
+          <p:nvPr/>
+        </p:nvSpPr>
+        <p:spPr>
+          <a:xfrm>
+            <a:off x="2328827" y="5372100"/>
+            <a:ext cx="14816173" cy="571500"/>
+          </a:xfrm>
+          <a:prstGeom prst="rect">
+            <a:avLst/>
           </a:prstGeom>
           <a:solidFill>
             <a:srgbClr val="FAFBFD"/>
@@ -8569,14 +8498,14 @@
       </p:sp>
       <p:sp>
         <p:nvSpPr>
-          <p:cNvPr id="29" name="TextBox 28"/>
-          <p:cNvSpPr txBox="1"/>
-          <p:nvPr/>
-        </p:nvSpPr>
-        <p:spPr>
-          <a:xfrm>
-            <a:off x="9559290" y="4171950"/>
-            <a:ext cx="2331720" cy="647700"/>
+          <p:cNvPr id="27" name="TextBox 26"/>
+          <p:cNvSpPr txBox="1"/>
+          <p:nvPr/>
+        </p:nvSpPr>
+        <p:spPr>
+          <a:xfrm>
+            <a:off x="2481227" y="5372100"/>
+            <a:ext cx="14511373" cy="571500"/>
           </a:xfrm>
           <a:prstGeom prst="rect">
             <a:avLst/>
@@ -8589,13 +8518,13 @@
           </a:bodyPr>
           <a:lstStyle/>
           <a:p>
-            <a:pPr algn="ctr">
+            <a:pPr algn="l">
               <a:lnSpc>
                 <a:spcPct val="115000"/>
               </a:lnSpc>
             </a:pPr>
             <a:r>
-              <a:rPr sz="1875" b="0">
+              <a:rPr sz="1800" b="0">
                 <a:solidFill>
                   <a:srgbClr val="3D3D3D"/>
                 </a:solidFill>
@@ -8603,689 +8532,14 @@
                 <a:ea typeface="Pretendard"/>
                 <a:cs typeface="Pretendard"/>
               </a:rPr>
-              <a:t>–</a:t>
-            </a:r>
-          </a:p>
-        </p:txBody>
-      </p:sp>
-      <p:sp>
-        <p:nvSpPr>
-          <p:cNvPr id="30" name="Rounded Rectangle 29"/>
-          <p:cNvSpPr/>
-          <p:nvPr/>
-        </p:nvSpPr>
-        <p:spPr>
-          <a:xfrm>
-            <a:off x="12024360" y="4171950"/>
-            <a:ext cx="5120640" cy="647700"/>
-          </a:xfrm>
-          <a:prstGeom prst="roundRect">
-            <a:avLst>
-              <a:gd name="adj" fmla="val 5882"/>
-            </a:avLst>
-          </a:prstGeom>
-          <a:solidFill>
-            <a:srgbClr val="FAFBFD"/>
-          </a:solidFill>
-          <a:ln w="9525">
-            <a:solidFill>
-              <a:srgbClr val="DCE1E8"/>
-            </a:solidFill>
-          </a:ln>
-          <a:effectLst/>
-        </p:spPr>
-        <p:txBody>
-          <a:bodyPr rtlCol="0" anchor="ctr" wrap="square"/>
-          <a:lstStyle/>
-          <a:p>
-            <a:pPr algn="ctr"/>
-          </a:p>
-        </p:txBody>
-      </p:sp>
-      <p:sp>
-        <p:nvSpPr>
-          <p:cNvPr id="31" name="TextBox 30"/>
-          <p:cNvSpPr txBox="1"/>
-          <p:nvPr/>
-        </p:nvSpPr>
-        <p:spPr>
-          <a:xfrm>
-            <a:off x="12119610" y="4171950"/>
-            <a:ext cx="4930140" cy="647700"/>
-          </a:xfrm>
-          <a:prstGeom prst="rect">
-            <a:avLst/>
-          </a:prstGeom>
-          <a:noFill/>
-        </p:spPr>
-        <p:txBody>
-          <a:bodyPr wrap="square" lIns="0" rIns="0" tIns="0" bIns="0" anchor="ctr">
-            <a:spAutoFit/>
-          </a:bodyPr>
-          <a:lstStyle/>
-          <a:p>
-            <a:pPr algn="ctr">
-              <a:lnSpc>
-                <a:spcPct val="115000"/>
-              </a:lnSpc>
-            </a:pPr>
-            <a:r>
-              <a:rPr sz="1875" b="0">
-                <a:solidFill>
-                  <a:srgbClr val="3D3D3D"/>
-                </a:solidFill>
-                <a:latin typeface="Pretendard"/>
-                <a:ea typeface="Pretendard"/>
-                <a:cs typeface="Pretendard"/>
-              </a:rPr>
-              <a:t>버킷·파일 다루는 CLI</a:t>
-            </a:r>
-          </a:p>
-        </p:txBody>
-      </p:sp>
-      <p:sp>
-        <p:nvSpPr>
-          <p:cNvPr id="32" name="Rounded Rectangle 31"/>
-          <p:cNvSpPr/>
-          <p:nvPr/>
-        </p:nvSpPr>
-        <p:spPr>
-          <a:xfrm>
-            <a:off x="1143000" y="4895850"/>
-            <a:ext cx="3162300" cy="647700"/>
-          </a:xfrm>
-          <a:prstGeom prst="roundRect">
-            <a:avLst>
-              <a:gd name="adj" fmla="val 5882"/>
-            </a:avLst>
-          </a:prstGeom>
-          <a:solidFill>
-            <a:srgbClr val="EDF3FD"/>
-          </a:solidFill>
-          <a:ln w="9525">
-            <a:solidFill>
-              <a:srgbClr val="BFD3F5"/>
-            </a:solidFill>
-          </a:ln>
-          <a:effectLst/>
-        </p:spPr>
-        <p:txBody>
-          <a:bodyPr rtlCol="0" anchor="ctr" wrap="square"/>
-          <a:lstStyle/>
-          <a:p>
-            <a:pPr algn="ctr"/>
-          </a:p>
-        </p:txBody>
-      </p:sp>
-      <p:sp>
-        <p:nvSpPr>
-          <p:cNvPr id="33" name="TextBox 32"/>
-          <p:cNvSpPr txBox="1"/>
-          <p:nvPr/>
-        </p:nvSpPr>
-        <p:spPr>
-          <a:xfrm>
-            <a:off x="1238250" y="4895850"/>
-            <a:ext cx="2971800" cy="647700"/>
-          </a:xfrm>
-          <a:prstGeom prst="rect">
-            <a:avLst/>
-          </a:prstGeom>
-          <a:noFill/>
-        </p:spPr>
-        <p:txBody>
-          <a:bodyPr wrap="square" lIns="0" rIns="0" tIns="0" bIns="0" anchor="ctr">
-            <a:spAutoFit/>
-          </a:bodyPr>
-          <a:lstStyle/>
-          <a:p>
-            <a:pPr algn="l">
-              <a:lnSpc>
-                <a:spcPct val="115000"/>
-              </a:lnSpc>
-            </a:pPr>
-            <a:r>
-              <a:rPr sz="1875" b="1">
-                <a:solidFill>
-                  <a:srgbClr val="0D2B5E"/>
-                </a:solidFill>
-                <a:latin typeface="Pretendard"/>
-                <a:ea typeface="Pretendard"/>
-                <a:cs typeface="Pretendard"/>
-              </a:rPr>
-              <a:t>rest</a:t>
-            </a:r>
-          </a:p>
-        </p:txBody>
-      </p:sp>
-      <p:sp>
-        <p:nvSpPr>
-          <p:cNvPr id="34" name="Rounded Rectangle 33"/>
-          <p:cNvSpPr/>
-          <p:nvPr/>
-        </p:nvSpPr>
-        <p:spPr>
-          <a:xfrm>
-            <a:off x="4343400" y="4895850"/>
-            <a:ext cx="5082540" cy="647700"/>
-          </a:xfrm>
-          <a:prstGeom prst="roundRect">
-            <a:avLst>
-              <a:gd name="adj" fmla="val 5882"/>
-            </a:avLst>
-          </a:prstGeom>
-          <a:solidFill>
-            <a:srgbClr val="FAFBFD"/>
-          </a:solidFill>
-          <a:ln w="9525">
-            <a:solidFill>
-              <a:srgbClr val="DCE1E8"/>
-            </a:solidFill>
-          </a:ln>
-          <a:effectLst/>
-        </p:spPr>
-        <p:txBody>
-          <a:bodyPr rtlCol="0" anchor="ctr" wrap="square"/>
-          <a:lstStyle/>
-          <a:p>
-            <a:pPr algn="ctr"/>
-          </a:p>
-        </p:txBody>
-      </p:sp>
-      <p:sp>
-        <p:nvSpPr>
-          <p:cNvPr id="35" name="TextBox 34"/>
-          <p:cNvSpPr txBox="1"/>
-          <p:nvPr/>
-        </p:nvSpPr>
-        <p:spPr>
-          <a:xfrm>
-            <a:off x="4438650" y="4895850"/>
-            <a:ext cx="4892040" cy="647700"/>
-          </a:xfrm>
-          <a:prstGeom prst="rect">
-            <a:avLst/>
-          </a:prstGeom>
-          <a:noFill/>
-        </p:spPr>
-        <p:txBody>
-          <a:bodyPr wrap="square" lIns="0" rIns="0" tIns="0" bIns="0" anchor="ctr">
-            <a:spAutoFit/>
-          </a:bodyPr>
-          <a:lstStyle/>
-          <a:p>
-            <a:pPr algn="ctr">
-              <a:lnSpc>
-                <a:spcPct val="115000"/>
-              </a:lnSpc>
-            </a:pPr>
-            <a:r>
-              <a:rPr sz="1875" b="0">
-                <a:solidFill>
-                  <a:srgbClr val="3D3D3D"/>
-                </a:solidFill>
-                <a:latin typeface="Pretendard"/>
-                <a:ea typeface="Pretendard"/>
-                <a:cs typeface="Pretendard"/>
-              </a:rPr>
-              <a:t>tabulario/iceberg-rest</a:t>
-            </a:r>
-          </a:p>
-        </p:txBody>
-      </p:sp>
-      <p:sp>
-        <p:nvSpPr>
-          <p:cNvPr id="36" name="Rounded Rectangle 35"/>
-          <p:cNvSpPr/>
-          <p:nvPr/>
-        </p:nvSpPr>
-        <p:spPr>
-          <a:xfrm>
-            <a:off x="9464040" y="4895850"/>
-            <a:ext cx="2522220" cy="647700"/>
-          </a:xfrm>
-          <a:prstGeom prst="roundRect">
-            <a:avLst>
-              <a:gd name="adj" fmla="val 5882"/>
-            </a:avLst>
-          </a:prstGeom>
-          <a:solidFill>
-            <a:srgbClr val="FAFBFD"/>
-          </a:solidFill>
-          <a:ln w="9525">
-            <a:solidFill>
-              <a:srgbClr val="DCE1E8"/>
-            </a:solidFill>
-          </a:ln>
-          <a:effectLst/>
-        </p:spPr>
-        <p:txBody>
-          <a:bodyPr rtlCol="0" anchor="ctr" wrap="square"/>
-          <a:lstStyle/>
-          <a:p>
-            <a:pPr algn="ctr"/>
-          </a:p>
-        </p:txBody>
-      </p:sp>
-      <p:sp>
-        <p:nvSpPr>
-          <p:cNvPr id="37" name="TextBox 36"/>
-          <p:cNvSpPr txBox="1"/>
-          <p:nvPr/>
-        </p:nvSpPr>
-        <p:spPr>
-          <a:xfrm>
-            <a:off x="9559290" y="4895850"/>
-            <a:ext cx="2331720" cy="647700"/>
-          </a:xfrm>
-          <a:prstGeom prst="rect">
-            <a:avLst/>
-          </a:prstGeom>
-          <a:noFill/>
-        </p:spPr>
-        <p:txBody>
-          <a:bodyPr wrap="square" lIns="0" rIns="0" tIns="0" bIns="0" anchor="ctr">
-            <a:spAutoFit/>
-          </a:bodyPr>
-          <a:lstStyle/>
-          <a:p>
-            <a:pPr algn="ctr">
-              <a:lnSpc>
-                <a:spcPct val="115000"/>
-              </a:lnSpc>
-            </a:pPr>
-            <a:r>
-              <a:rPr sz="1875" b="0">
-                <a:solidFill>
-                  <a:srgbClr val="3D3D3D"/>
-                </a:solidFill>
-                <a:latin typeface="Pretendard"/>
-                <a:ea typeface="Pretendard"/>
-                <a:cs typeface="Pretendard"/>
-              </a:rPr>
-              <a:t>8181</a:t>
-            </a:r>
-          </a:p>
-        </p:txBody>
-      </p:sp>
-      <p:sp>
-        <p:nvSpPr>
-          <p:cNvPr id="38" name="Rounded Rectangle 37"/>
-          <p:cNvSpPr/>
-          <p:nvPr/>
-        </p:nvSpPr>
-        <p:spPr>
-          <a:xfrm>
-            <a:off x="12024360" y="4895850"/>
-            <a:ext cx="5120640" cy="647700"/>
-          </a:xfrm>
-          <a:prstGeom prst="roundRect">
-            <a:avLst>
-              <a:gd name="adj" fmla="val 5882"/>
-            </a:avLst>
-          </a:prstGeom>
-          <a:solidFill>
-            <a:srgbClr val="FAFBFD"/>
-          </a:solidFill>
-          <a:ln w="9525">
-            <a:solidFill>
-              <a:srgbClr val="DCE1E8"/>
-            </a:solidFill>
-          </a:ln>
-          <a:effectLst/>
-        </p:spPr>
-        <p:txBody>
-          <a:bodyPr rtlCol="0" anchor="ctr" wrap="square"/>
-          <a:lstStyle/>
-          <a:p>
-            <a:pPr algn="ctr"/>
-          </a:p>
-        </p:txBody>
-      </p:sp>
-      <p:sp>
-        <p:nvSpPr>
-          <p:cNvPr id="39" name="TextBox 38"/>
-          <p:cNvSpPr txBox="1"/>
-          <p:nvPr/>
-        </p:nvSpPr>
-        <p:spPr>
-          <a:xfrm>
-            <a:off x="12119610" y="4895850"/>
-            <a:ext cx="4930140" cy="647700"/>
-          </a:xfrm>
-          <a:prstGeom prst="rect">
-            <a:avLst/>
-          </a:prstGeom>
-          <a:noFill/>
-        </p:spPr>
-        <p:txBody>
-          <a:bodyPr wrap="square" lIns="0" rIns="0" tIns="0" bIns="0" anchor="ctr">
-            <a:spAutoFit/>
-          </a:bodyPr>
-          <a:lstStyle/>
-          <a:p>
-            <a:pPr algn="ctr">
-              <a:lnSpc>
-                <a:spcPct val="115000"/>
-              </a:lnSpc>
-            </a:pPr>
-            <a:r>
-              <a:rPr sz="1875" b="0">
-                <a:solidFill>
-                  <a:srgbClr val="3D3D3D"/>
-                </a:solidFill>
-                <a:latin typeface="Pretendard"/>
-                <a:ea typeface="Pretendard"/>
-                <a:cs typeface="Pretendard"/>
-              </a:rPr>
-              <a:t>REST 카탈로그</a:t>
-            </a:r>
-          </a:p>
-        </p:txBody>
-      </p:sp>
-      <p:sp>
-        <p:nvSpPr>
-          <p:cNvPr id="40" name="Rounded Rectangle 39"/>
-          <p:cNvSpPr/>
-          <p:nvPr/>
-        </p:nvSpPr>
-        <p:spPr>
-          <a:xfrm>
-            <a:off x="1143000" y="5619750"/>
-            <a:ext cx="3162300" cy="647700"/>
-          </a:xfrm>
-          <a:prstGeom prst="roundRect">
-            <a:avLst>
-              <a:gd name="adj" fmla="val 5882"/>
-            </a:avLst>
-          </a:prstGeom>
-          <a:solidFill>
-            <a:srgbClr val="EDF3FD"/>
-          </a:solidFill>
-          <a:ln w="9525">
-            <a:solidFill>
-              <a:srgbClr val="BFD3F5"/>
-            </a:solidFill>
-          </a:ln>
-          <a:effectLst/>
-        </p:spPr>
-        <p:txBody>
-          <a:bodyPr rtlCol="0" anchor="ctr" wrap="square"/>
-          <a:lstStyle/>
-          <a:p>
-            <a:pPr algn="ctr"/>
-          </a:p>
-        </p:txBody>
-      </p:sp>
-      <p:sp>
-        <p:nvSpPr>
-          <p:cNvPr id="41" name="TextBox 40"/>
-          <p:cNvSpPr txBox="1"/>
-          <p:nvPr/>
-        </p:nvSpPr>
-        <p:spPr>
-          <a:xfrm>
-            <a:off x="1238250" y="5619750"/>
-            <a:ext cx="2971800" cy="647700"/>
-          </a:xfrm>
-          <a:prstGeom prst="rect">
-            <a:avLst/>
-          </a:prstGeom>
-          <a:noFill/>
-        </p:spPr>
-        <p:txBody>
-          <a:bodyPr wrap="square" lIns="0" rIns="0" tIns="0" bIns="0" anchor="ctr">
-            <a:spAutoFit/>
-          </a:bodyPr>
-          <a:lstStyle/>
-          <a:p>
-            <a:pPr algn="l">
-              <a:lnSpc>
-                <a:spcPct val="115000"/>
-              </a:lnSpc>
-            </a:pPr>
-            <a:r>
-              <a:rPr sz="1875" b="1">
-                <a:solidFill>
-                  <a:srgbClr val="0D2B5E"/>
-                </a:solidFill>
-                <a:latin typeface="Pretendard"/>
-                <a:ea typeface="Pretendard"/>
-                <a:cs typeface="Pretendard"/>
-              </a:rPr>
-              <a:t>spark-iceberg</a:t>
-            </a:r>
-          </a:p>
-        </p:txBody>
-      </p:sp>
-      <p:sp>
-        <p:nvSpPr>
-          <p:cNvPr id="42" name="Rounded Rectangle 41"/>
-          <p:cNvSpPr/>
-          <p:nvPr/>
-        </p:nvSpPr>
-        <p:spPr>
-          <a:xfrm>
-            <a:off x="4343400" y="5619750"/>
-            <a:ext cx="5082540" cy="647700"/>
-          </a:xfrm>
-          <a:prstGeom prst="roundRect">
-            <a:avLst>
-              <a:gd name="adj" fmla="val 5882"/>
-            </a:avLst>
-          </a:prstGeom>
-          <a:solidFill>
-            <a:srgbClr val="FAFBFD"/>
-          </a:solidFill>
-          <a:ln w="9525">
-            <a:solidFill>
-              <a:srgbClr val="DCE1E8"/>
-            </a:solidFill>
-          </a:ln>
-          <a:effectLst/>
-        </p:spPr>
-        <p:txBody>
-          <a:bodyPr rtlCol="0" anchor="ctr" wrap="square"/>
-          <a:lstStyle/>
-          <a:p>
-            <a:pPr algn="ctr"/>
-          </a:p>
-        </p:txBody>
-      </p:sp>
-      <p:sp>
-        <p:nvSpPr>
-          <p:cNvPr id="43" name="TextBox 42"/>
-          <p:cNvSpPr txBox="1"/>
-          <p:nvPr/>
-        </p:nvSpPr>
-        <p:spPr>
-          <a:xfrm>
-            <a:off x="4438650" y="5619750"/>
-            <a:ext cx="4892040" cy="647700"/>
-          </a:xfrm>
-          <a:prstGeom prst="rect">
-            <a:avLst/>
-          </a:prstGeom>
-          <a:noFill/>
-        </p:spPr>
-        <p:txBody>
-          <a:bodyPr wrap="square" lIns="0" rIns="0" tIns="0" bIns="0" anchor="ctr">
-            <a:spAutoFit/>
-          </a:bodyPr>
-          <a:lstStyle/>
-          <a:p>
-            <a:pPr algn="ctr">
-              <a:lnSpc>
-                <a:spcPct val="115000"/>
-              </a:lnSpc>
-            </a:pPr>
-            <a:r>
-              <a:rPr sz="1875" b="0">
-                <a:solidFill>
-                  <a:srgbClr val="3D3D3D"/>
-                </a:solidFill>
-                <a:latin typeface="Pretendard"/>
-                <a:ea typeface="Pretendard"/>
-                <a:cs typeface="Pretendard"/>
-              </a:rPr>
-              <a:t>tabulario/spark-iceberg</a:t>
-            </a:r>
-          </a:p>
-        </p:txBody>
-      </p:sp>
-      <p:sp>
-        <p:nvSpPr>
-          <p:cNvPr id="44" name="Rounded Rectangle 43"/>
-          <p:cNvSpPr/>
-          <p:nvPr/>
-        </p:nvSpPr>
-        <p:spPr>
-          <a:xfrm>
-            <a:off x="9464040" y="5619750"/>
-            <a:ext cx="2522220" cy="647700"/>
-          </a:xfrm>
-          <a:prstGeom prst="roundRect">
-            <a:avLst>
-              <a:gd name="adj" fmla="val 5882"/>
-            </a:avLst>
-          </a:prstGeom>
-          <a:solidFill>
-            <a:srgbClr val="FAFBFD"/>
-          </a:solidFill>
-          <a:ln w="9525">
-            <a:solidFill>
-              <a:srgbClr val="DCE1E8"/>
-            </a:solidFill>
-          </a:ln>
-          <a:effectLst/>
-        </p:spPr>
-        <p:txBody>
-          <a:bodyPr rtlCol="0" anchor="ctr" wrap="square"/>
-          <a:lstStyle/>
-          <a:p>
-            <a:pPr algn="ctr"/>
-          </a:p>
-        </p:txBody>
-      </p:sp>
-      <p:sp>
-        <p:nvSpPr>
-          <p:cNvPr id="45" name="TextBox 44"/>
-          <p:cNvSpPr txBox="1"/>
-          <p:nvPr/>
-        </p:nvSpPr>
-        <p:spPr>
-          <a:xfrm>
-            <a:off x="9559290" y="5619750"/>
-            <a:ext cx="2331720" cy="647700"/>
-          </a:xfrm>
-          <a:prstGeom prst="rect">
-            <a:avLst/>
-          </a:prstGeom>
-          <a:noFill/>
-        </p:spPr>
-        <p:txBody>
-          <a:bodyPr wrap="square" lIns="0" rIns="0" tIns="0" bIns="0" anchor="ctr">
-            <a:spAutoFit/>
-          </a:bodyPr>
-          <a:lstStyle/>
-          <a:p>
-            <a:pPr algn="ctr">
-              <a:lnSpc>
-                <a:spcPct val="115000"/>
-              </a:lnSpc>
-            </a:pPr>
-            <a:r>
-              <a:rPr sz="1875" b="0">
-                <a:solidFill>
-                  <a:srgbClr val="3D3D3D"/>
-                </a:solidFill>
-                <a:latin typeface="Pretendard"/>
-                <a:ea typeface="Pretendard"/>
-                <a:cs typeface="Pretendard"/>
-              </a:rPr>
-              <a:t>8888</a:t>
-            </a:r>
-          </a:p>
-        </p:txBody>
-      </p:sp>
-      <p:sp>
-        <p:nvSpPr>
-          <p:cNvPr id="46" name="Rounded Rectangle 45"/>
-          <p:cNvSpPr/>
-          <p:nvPr/>
-        </p:nvSpPr>
-        <p:spPr>
-          <a:xfrm>
-            <a:off x="12024360" y="5619750"/>
-            <a:ext cx="5120640" cy="647700"/>
-          </a:xfrm>
-          <a:prstGeom prst="roundRect">
-            <a:avLst>
-              <a:gd name="adj" fmla="val 5882"/>
-            </a:avLst>
-          </a:prstGeom>
-          <a:solidFill>
-            <a:srgbClr val="FAFBFD"/>
-          </a:solidFill>
-          <a:ln w="9525">
-            <a:solidFill>
-              <a:srgbClr val="DCE1E8"/>
-            </a:solidFill>
-          </a:ln>
-          <a:effectLst/>
-        </p:spPr>
-        <p:txBody>
-          <a:bodyPr rtlCol="0" anchor="ctr" wrap="square"/>
-          <a:lstStyle/>
-          <a:p>
-            <a:pPr algn="ctr"/>
-          </a:p>
-        </p:txBody>
-      </p:sp>
-      <p:sp>
-        <p:nvSpPr>
-          <p:cNvPr id="47" name="TextBox 46"/>
-          <p:cNvSpPr txBox="1"/>
-          <p:nvPr/>
-        </p:nvSpPr>
-        <p:spPr>
-          <a:xfrm>
-            <a:off x="12119610" y="5619750"/>
-            <a:ext cx="4930140" cy="647700"/>
-          </a:xfrm>
-          <a:prstGeom prst="rect">
-            <a:avLst/>
-          </a:prstGeom>
-          <a:noFill/>
-        </p:spPr>
-        <p:txBody>
-          <a:bodyPr wrap="square" lIns="0" rIns="0" tIns="0" bIns="0" anchor="ctr">
-            <a:spAutoFit/>
-          </a:bodyPr>
-          <a:lstStyle/>
-          <a:p>
-            <a:pPr algn="ctr">
-              <a:lnSpc>
-                <a:spcPct val="115000"/>
-              </a:lnSpc>
-            </a:pPr>
-            <a:r>
-              <a:rPr sz="1875" b="0">
-                <a:solidFill>
-                  <a:srgbClr val="3D3D3D"/>
-                </a:solidFill>
-                <a:latin typeface="Pretendard"/>
-                <a:ea typeface="Pretendard"/>
-                <a:cs typeface="Pretendard"/>
-              </a:rPr>
-              <a:t>Spark 엔진 · scripts/ 마운트</a:t>
-            </a:r>
-          </a:p>
-        </p:txBody>
-      </p:sp>
-      <p:sp>
-        <p:nvSpPr>
-          <p:cNvPr id="48" name="TextBox 47"/>
+              <a:t>exec mc mc mb -p local/warehouse → mc ls local</a:t>
+            </a:r>
+          </a:p>
+        </p:txBody>
+      </p:sp>
+      <p:sp>
+        <p:nvSpPr>
+          <p:cNvPr id="28" name="TextBox 27"/>
           <p:cNvSpPr txBox="1"/>
           <p:nvPr/>
         </p:nvSpPr>
@@ -9319,14 +8573,14 @@
                 <a:ea typeface="Pretendard"/>
                 <a:cs typeface="Pretendard"/>
               </a:rPr>
-              <a:t>계정은 전부 minioadmin · rest 의 CATALOG_WAREHOUSE=s3://warehouse/ · minio 에 warehouse.minio 별칭(aliases) — Iceberg 공식 Quickstart 구성</a:t>
-            </a:r>
-          </a:p>
-        </p:txBody>
-      </p:sp>
-      <p:sp>
-        <p:nvSpPr>
-          <p:cNvPr id="49" name="Rectangle 48"/>
+              <a:t>확인: 네 컨테이너(iceberg-rest · mc · minio · spark-iceberg) Up · 볼륨 lakehouse_rest-catalog Created · 버킷 raw/ · warehouse/</a:t>
+            </a:r>
+          </a:p>
+        </p:txBody>
+      </p:sp>
+      <p:sp>
+        <p:nvSpPr>
+          <p:cNvPr id="29" name="Rectangle 28"/>
           <p:cNvSpPr/>
           <p:nvPr/>
         </p:nvSpPr>
@@ -9356,7 +8610,7 @@
       </p:sp>
       <p:sp>
         <p:nvSpPr>
-          <p:cNvPr id="50" name="TextBox 49"/>
+          <p:cNvPr id="30" name="TextBox 29"/>
           <p:cNvSpPr txBox="1"/>
           <p:nvPr/>
         </p:nvSpPr>
@@ -9397,7 +8651,7 @@
       </p:sp>
       <p:sp>
         <p:nvSpPr>
-          <p:cNvPr id="51" name="TextBox 50"/>
+          <p:cNvPr id="31" name="TextBox 30"/>
           <p:cNvSpPr txBox="1"/>
           <p:nvPr/>
         </p:nvSpPr>
@@ -9580,7 +8834,7 @@
                 <a:ea typeface="Pretendard"/>
                 <a:cs typeface="Pretendard"/>
               </a:rPr>
-              <a:t>1단계</a:t>
+              <a:t>1단계 · 왜 카탈로그 볼륨인가</a:t>
             </a:r>
           </a:p>
         </p:txBody>
@@ -9621,7 +8875,7 @@
                 <a:ea typeface="Pretendard"/>
                 <a:cs typeface="Pretendard"/>
               </a:rPr>
-              <a:t>핵심 명령 — 띄우고, 별칭 잡고, 버킷 만들기</a:t>
+              <a:t>카탈로그를 볼륨의 파일에 남긴다</a:t>
             </a:r>
           </a:p>
         </p:txBody>
@@ -9658,31 +8912,42 @@
       </p:sp>
       <p:sp>
         <p:nvSpPr>
-          <p:cNvPr id="8" name="Rectangle 7"/>
-          <p:cNvSpPr/>
-          <p:nvPr/>
-        </p:nvSpPr>
-        <p:spPr>
-          <a:xfrm>
-            <a:off x="1143000" y="2781300"/>
-            <a:ext cx="935581" cy="571500"/>
-          </a:xfrm>
-          <a:prstGeom prst="rect">
-            <a:avLst/>
-          </a:prstGeom>
-          <a:solidFill>
-            <a:srgbClr val="0D2B5E"/>
-          </a:solidFill>
-          <a:ln>
-            <a:noFill/>
-          </a:ln>
-          <a:effectLst/>
-        </p:spPr>
-        <p:txBody>
-          <a:bodyPr rtlCol="0" anchor="ctr" wrap="square"/>
-          <a:lstStyle/>
-          <a:p>
-            <a:pPr algn="ctr"/>
+          <p:cNvPr id="8" name="TextBox 7"/>
+          <p:cNvSpPr txBox="1"/>
+          <p:nvPr/>
+        </p:nvSpPr>
+        <p:spPr>
+          <a:xfrm>
+            <a:off x="1143000" y="2857500"/>
+            <a:ext cx="7372350" cy="533400"/>
+          </a:xfrm>
+          <a:prstGeom prst="rect">
+            <a:avLst/>
+          </a:prstGeom>
+          <a:noFill/>
+        </p:spPr>
+        <p:txBody>
+          <a:bodyPr wrap="square" lIns="0" rIns="0" tIns="0" bIns="0" anchor="t">
+            <a:spAutoFit/>
+          </a:bodyPr>
+          <a:lstStyle/>
+          <a:p>
+            <a:pPr algn="l">
+              <a:lnSpc>
+                <a:spcPct val="110000"/>
+              </a:lnSpc>
+            </a:pPr>
+            <a:r>
+              <a:rPr sz="3150" b="1">
+                <a:solidFill>
+                  <a:srgbClr val="0D2B5E"/>
+                </a:solidFill>
+                <a:latin typeface="Pretendard"/>
+                <a:ea typeface="Pretendard"/>
+                <a:cs typeface="Pretendard"/>
+              </a:rPr>
+              <a:t>볼륨 없이 — 이미지 기본값</a:t>
+            </a:r>
           </a:p>
         </p:txBody>
       </p:sp>
@@ -9694,52 +8959,54 @@
         </p:nvSpPr>
         <p:spPr>
           <a:xfrm>
-            <a:off x="1143000" y="2781300"/>
-            <a:ext cx="935581" cy="571500"/>
-          </a:xfrm>
-          <a:prstGeom prst="rect">
-            <a:avLst/>
-          </a:prstGeom>
-          <a:noFill/>
-        </p:spPr>
-        <p:txBody>
-          <a:bodyPr wrap="square" lIns="0" rIns="0" tIns="0" bIns="0" anchor="ctr">
-            <a:spAutoFit/>
-          </a:bodyPr>
-          <a:lstStyle/>
-          <a:p>
-            <a:pPr algn="ctr">
-              <a:lnSpc>
-                <a:spcPct val="100000"/>
-              </a:lnSpc>
-            </a:pPr>
-            <a:r>
-              <a:rPr sz="1800" b="1">
-                <a:solidFill>
-                  <a:srgbClr val="FFFFFF"/>
-                </a:solidFill>
-                <a:latin typeface="Pretendard"/>
-                <a:ea typeface="Pretendard"/>
-                <a:cs typeface="Pretendard"/>
-              </a:rPr>
-              <a:t>폴더</a:t>
-            </a:r>
-          </a:p>
-        </p:txBody>
-      </p:sp>
-      <p:sp>
-        <p:nvSpPr>
-          <p:cNvPr id="10" name="Rectangle 9"/>
-          <p:cNvSpPr/>
-          <p:nvPr/>
-        </p:nvSpPr>
-        <p:spPr>
-          <a:xfrm>
-            <a:off x="2078581" y="2781300"/>
-            <a:ext cx="15066419" cy="571500"/>
-          </a:xfrm>
-          <a:prstGeom prst="rect">
-            <a:avLst/>
+            <a:off x="1143000" y="3467100"/>
+            <a:ext cx="7372350" cy="876300"/>
+          </a:xfrm>
+          <a:prstGeom prst="rect">
+            <a:avLst/>
+          </a:prstGeom>
+          <a:noFill/>
+        </p:spPr>
+        <p:txBody>
+          <a:bodyPr wrap="square" lIns="0" rIns="0" tIns="0" bIns="0" anchor="t">
+            <a:spAutoFit/>
+          </a:bodyPr>
+          <a:lstStyle/>
+          <a:p>
+            <a:pPr algn="l">
+              <a:lnSpc>
+                <a:spcPct val="146000"/>
+              </a:lnSpc>
+            </a:pPr>
+            <a:r>
+              <a:rPr sz="2250" b="0">
+                <a:solidFill>
+                  <a:srgbClr val="3D3D3D"/>
+                </a:solidFill>
+                <a:latin typeface="Pretendard"/>
+                <a:ea typeface="Pretendard"/>
+                <a:cs typeface="Pretendard"/>
+              </a:rPr>
+              <a:t>jdbc:sqlite:file:/tmp/iceberg_rest_mode=memory</a:t>
+            </a:r>
+          </a:p>
+        </p:txBody>
+      </p:sp>
+      <p:sp>
+        <p:nvSpPr>
+          <p:cNvPr id="10" name="Rounded Rectangle 9"/>
+          <p:cNvSpPr/>
+          <p:nvPr/>
+        </p:nvSpPr>
+        <p:spPr>
+          <a:xfrm>
+            <a:off x="1143000" y="4610100"/>
+            <a:ext cx="7372350" cy="2857500"/>
+          </a:xfrm>
+          <a:prstGeom prst="roundRect">
+            <a:avLst>
+              <a:gd name="adj" fmla="val 1666"/>
+            </a:avLst>
           </a:prstGeom>
           <a:solidFill>
             <a:srgbClr val="FAFBFD"/>
@@ -9761,61 +9028,20 @@
       </p:sp>
       <p:sp>
         <p:nvSpPr>
-          <p:cNvPr id="11" name="TextBox 10"/>
-          <p:cNvSpPr txBox="1"/>
-          <p:nvPr/>
-        </p:nvSpPr>
-        <p:spPr>
-          <a:xfrm>
-            <a:off x="2230981" y="2781300"/>
-            <a:ext cx="14761619" cy="571500"/>
-          </a:xfrm>
-          <a:prstGeom prst="rect">
-            <a:avLst/>
-          </a:prstGeom>
-          <a:noFill/>
-        </p:spPr>
-        <p:txBody>
-          <a:bodyPr wrap="square" lIns="0" rIns="0" tIns="0" bIns="0" anchor="ctr">
-            <a:spAutoFit/>
-          </a:bodyPr>
-          <a:lstStyle/>
-          <a:p>
-            <a:pPr algn="l">
-              <a:lnSpc>
-                <a:spcPct val="115000"/>
-              </a:lnSpc>
-            </a:pPr>
-            <a:r>
-              <a:rPr sz="1800" b="0">
-                <a:solidFill>
-                  <a:srgbClr val="3D3D3D"/>
-                </a:solidFill>
-                <a:latin typeface="Pretendard"/>
-                <a:ea typeface="Pretendard"/>
-                <a:cs typeface="Pretendard"/>
-              </a:rPr>
-              <a:t>mkdir -p scripts</a:t>
-            </a:r>
-          </a:p>
-        </p:txBody>
-      </p:sp>
-      <p:sp>
-        <p:nvSpPr>
-          <p:cNvPr id="12" name="Rectangle 11"/>
-          <p:cNvSpPr/>
-          <p:nvPr/>
-        </p:nvSpPr>
-        <p:spPr>
-          <a:xfrm>
-            <a:off x="1143000" y="3429000"/>
-            <a:ext cx="935581" cy="571500"/>
-          </a:xfrm>
-          <a:prstGeom prst="rect">
-            <a:avLst/>
-          </a:prstGeom>
-          <a:solidFill>
-            <a:srgbClr val="0D2B5E"/>
+          <p:cNvPr id="11" name="Oval 10"/>
+          <p:cNvSpPr/>
+          <p:nvPr/>
+        </p:nvSpPr>
+        <p:spPr>
+          <a:xfrm>
+            <a:off x="1447800" y="5016817"/>
+            <a:ext cx="97155" cy="97155"/>
+          </a:xfrm>
+          <a:prstGeom prst="ellipse">
+            <a:avLst/>
+          </a:prstGeom>
+          <a:solidFill>
+            <a:srgbClr val="1E5BC6"/>
           </a:solidFill>
           <a:ln>
             <a:noFill/>
@@ -9832,14 +9058,14 @@
       </p:sp>
       <p:sp>
         <p:nvSpPr>
-          <p:cNvPr id="13" name="TextBox 12"/>
-          <p:cNvSpPr txBox="1"/>
-          <p:nvPr/>
-        </p:nvSpPr>
-        <p:spPr>
-          <a:xfrm>
-            <a:off x="1143000" y="3429000"/>
-            <a:ext cx="935581" cy="571500"/>
+          <p:cNvPr id="12" name="TextBox 11"/>
+          <p:cNvSpPr txBox="1"/>
+          <p:nvPr/>
+        </p:nvSpPr>
+        <p:spPr>
+          <a:xfrm>
+            <a:off x="1633538" y="4838700"/>
+            <a:ext cx="6634162" cy="453390"/>
           </a:xfrm>
           <a:prstGeom prst="rect">
             <a:avLst/>
@@ -9852,38 +9078,335 @@
           </a:bodyPr>
           <a:lstStyle/>
           <a:p>
-            <a:pPr algn="ctr">
-              <a:lnSpc>
-                <a:spcPct val="100000"/>
-              </a:lnSpc>
-            </a:pPr>
-            <a:r>
-              <a:rPr sz="1800" b="1">
-                <a:solidFill>
-                  <a:srgbClr val="FFFFFF"/>
-                </a:solidFill>
-                <a:latin typeface="Pretendard"/>
-                <a:ea typeface="Pretendard"/>
-                <a:cs typeface="Pretendard"/>
-              </a:rPr>
-              <a:t>띄우기</a:t>
-            </a:r>
-          </a:p>
-        </p:txBody>
-      </p:sp>
-      <p:sp>
-        <p:nvSpPr>
-          <p:cNvPr id="14" name="Rectangle 13"/>
-          <p:cNvSpPr/>
-          <p:nvPr/>
-        </p:nvSpPr>
-        <p:spPr>
-          <a:xfrm>
-            <a:off x="2078581" y="3429000"/>
-            <a:ext cx="15066419" cy="571500"/>
-          </a:xfrm>
-          <a:prstGeom prst="rect">
-            <a:avLst/>
+            <a:pPr algn="l">
+              <a:lnSpc>
+                <a:spcPct val="120000"/>
+              </a:lnSpc>
+            </a:pPr>
+            <a:r>
+              <a:rPr sz="1575" b="0">
+                <a:solidFill>
+                  <a:srgbClr val="3D3D3D"/>
+                </a:solidFill>
+                <a:latin typeface="Pretendard"/>
+                <a:ea typeface="Pretendard"/>
+                <a:cs typeface="Pretendard"/>
+              </a:rPr>
+              <a:t>이름과 달리 컨테이너 안의 파일</a:t>
+            </a:r>
+          </a:p>
+        </p:txBody>
+      </p:sp>
+      <p:sp>
+        <p:nvSpPr>
+          <p:cNvPr id="13" name="Oval 12"/>
+          <p:cNvSpPr/>
+          <p:nvPr/>
+        </p:nvSpPr>
+        <p:spPr>
+          <a:xfrm>
+            <a:off x="1447800" y="5527358"/>
+            <a:ext cx="97155" cy="97155"/>
+          </a:xfrm>
+          <a:prstGeom prst="ellipse">
+            <a:avLst/>
+          </a:prstGeom>
+          <a:solidFill>
+            <a:srgbClr val="1E5BC6"/>
+          </a:solidFill>
+          <a:ln>
+            <a:noFill/>
+          </a:ln>
+          <a:effectLst/>
+        </p:spPr>
+        <p:txBody>
+          <a:bodyPr rtlCol="0" anchor="ctr" wrap="square"/>
+          <a:lstStyle/>
+          <a:p>
+            <a:pPr algn="ctr"/>
+          </a:p>
+        </p:txBody>
+      </p:sp>
+      <p:sp>
+        <p:nvSpPr>
+          <p:cNvPr id="14" name="TextBox 13"/>
+          <p:cNvSpPr txBox="1"/>
+          <p:nvPr/>
+        </p:nvSpPr>
+        <p:spPr>
+          <a:xfrm>
+            <a:off x="1633538" y="5349240"/>
+            <a:ext cx="6634162" cy="453390"/>
+          </a:xfrm>
+          <a:prstGeom prst="rect">
+            <a:avLst/>
+          </a:prstGeom>
+          <a:noFill/>
+        </p:spPr>
+        <p:txBody>
+          <a:bodyPr wrap="square" lIns="0" rIns="0" tIns="0" bIns="0" anchor="ctr">
+            <a:spAutoFit/>
+          </a:bodyPr>
+          <a:lstStyle/>
+          <a:p>
+            <a:pPr algn="l">
+              <a:lnSpc>
+                <a:spcPct val="120000"/>
+              </a:lnSpc>
+            </a:pPr>
+            <a:r>
+              <a:rPr sz="1575" b="0">
+                <a:solidFill>
+                  <a:srgbClr val="3D3D3D"/>
+                </a:solidFill>
+                <a:latin typeface="Pretendard"/>
+                <a:ea typeface="Pretendard"/>
+                <a:cs typeface="Pretendard"/>
+              </a:rPr>
+              <a:t>restart 는 버틴다</a:t>
+            </a:r>
+          </a:p>
+        </p:txBody>
+      </p:sp>
+      <p:sp>
+        <p:nvSpPr>
+          <p:cNvPr id="15" name="Oval 14"/>
+          <p:cNvSpPr/>
+          <p:nvPr/>
+        </p:nvSpPr>
+        <p:spPr>
+          <a:xfrm>
+            <a:off x="1447800" y="6037898"/>
+            <a:ext cx="97155" cy="97155"/>
+          </a:xfrm>
+          <a:prstGeom prst="ellipse">
+            <a:avLst/>
+          </a:prstGeom>
+          <a:solidFill>
+            <a:srgbClr val="1E5BC6"/>
+          </a:solidFill>
+          <a:ln>
+            <a:noFill/>
+          </a:ln>
+          <a:effectLst/>
+        </p:spPr>
+        <p:txBody>
+          <a:bodyPr rtlCol="0" anchor="ctr" wrap="square"/>
+          <a:lstStyle/>
+          <a:p>
+            <a:pPr algn="ctr"/>
+          </a:p>
+        </p:txBody>
+      </p:sp>
+      <p:sp>
+        <p:nvSpPr>
+          <p:cNvPr id="16" name="TextBox 15"/>
+          <p:cNvSpPr txBox="1"/>
+          <p:nvPr/>
+        </p:nvSpPr>
+        <p:spPr>
+          <a:xfrm>
+            <a:off x="1633538" y="5859780"/>
+            <a:ext cx="6634162" cy="453390"/>
+          </a:xfrm>
+          <a:prstGeom prst="rect">
+            <a:avLst/>
+          </a:prstGeom>
+          <a:noFill/>
+        </p:spPr>
+        <p:txBody>
+          <a:bodyPr wrap="square" lIns="0" rIns="0" tIns="0" bIns="0" anchor="ctr">
+            <a:spAutoFit/>
+          </a:bodyPr>
+          <a:lstStyle/>
+          <a:p>
+            <a:pPr algn="l">
+              <a:lnSpc>
+                <a:spcPct val="120000"/>
+              </a:lnSpc>
+            </a:pPr>
+            <a:r>
+              <a:rPr sz="1575" b="0">
+                <a:solidFill>
+                  <a:srgbClr val="3D3D3D"/>
+                </a:solidFill>
+                <a:latin typeface="Pretendard"/>
+                <a:ea typeface="Pretendard"/>
+                <a:cs typeface="Pretendard"/>
+              </a:rPr>
+              <a:t>down → up 이면 테이블 목록이 사라진다</a:t>
+            </a:r>
+          </a:p>
+        </p:txBody>
+      </p:sp>
+      <p:sp>
+        <p:nvSpPr>
+          <p:cNvPr id="17" name="Oval 16"/>
+          <p:cNvSpPr/>
+          <p:nvPr/>
+        </p:nvSpPr>
+        <p:spPr>
+          <a:xfrm>
+            <a:off x="1447800" y="6548438"/>
+            <a:ext cx="97155" cy="97155"/>
+          </a:xfrm>
+          <a:prstGeom prst="ellipse">
+            <a:avLst/>
+          </a:prstGeom>
+          <a:solidFill>
+            <a:srgbClr val="1E5BC6"/>
+          </a:solidFill>
+          <a:ln>
+            <a:noFill/>
+          </a:ln>
+          <a:effectLst/>
+        </p:spPr>
+        <p:txBody>
+          <a:bodyPr rtlCol="0" anchor="ctr" wrap="square"/>
+          <a:lstStyle/>
+          <a:p>
+            <a:pPr algn="ctr"/>
+          </a:p>
+        </p:txBody>
+      </p:sp>
+      <p:sp>
+        <p:nvSpPr>
+          <p:cNvPr id="18" name="TextBox 17"/>
+          <p:cNvSpPr txBox="1"/>
+          <p:nvPr/>
+        </p:nvSpPr>
+        <p:spPr>
+          <a:xfrm>
+            <a:off x="1633538" y="6370320"/>
+            <a:ext cx="6634162" cy="453390"/>
+          </a:xfrm>
+          <a:prstGeom prst="rect">
+            <a:avLst/>
+          </a:prstGeom>
+          <a:noFill/>
+        </p:spPr>
+        <p:txBody>
+          <a:bodyPr wrap="square" lIns="0" rIns="0" tIns="0" bIns="0" anchor="ctr">
+            <a:spAutoFit/>
+          </a:bodyPr>
+          <a:lstStyle/>
+          <a:p>
+            <a:pPr algn="l">
+              <a:lnSpc>
+                <a:spcPct val="120000"/>
+              </a:lnSpc>
+            </a:pPr>
+            <a:r>
+              <a:rPr sz="1575" b="0">
+                <a:solidFill>
+                  <a:srgbClr val="3D3D3D"/>
+                </a:solidFill>
+                <a:latin typeface="Pretendard"/>
+                <a:ea typeface="Pretendard"/>
+                <a:cs typeface="Pretendard"/>
+              </a:rPr>
+              <a:t>MinIO 의 파일은 그대로 남는다</a:t>
+            </a:r>
+          </a:p>
+        </p:txBody>
+      </p:sp>
+      <p:sp>
+        <p:nvSpPr>
+          <p:cNvPr id="19" name="TextBox 18"/>
+          <p:cNvSpPr txBox="1"/>
+          <p:nvPr/>
+        </p:nvSpPr>
+        <p:spPr>
+          <a:xfrm>
+            <a:off x="9772650" y="2857500"/>
+            <a:ext cx="7372350" cy="533400"/>
+          </a:xfrm>
+          <a:prstGeom prst="rect">
+            <a:avLst/>
+          </a:prstGeom>
+          <a:noFill/>
+        </p:spPr>
+        <p:txBody>
+          <a:bodyPr wrap="square" lIns="0" rIns="0" tIns="0" bIns="0" anchor="t">
+            <a:spAutoFit/>
+          </a:bodyPr>
+          <a:lstStyle/>
+          <a:p>
+            <a:pPr algn="l">
+              <a:lnSpc>
+                <a:spcPct val="110000"/>
+              </a:lnSpc>
+            </a:pPr>
+            <a:r>
+              <a:rPr sz="3150" b="1">
+                <a:solidFill>
+                  <a:srgbClr val="0D2B5E"/>
+                </a:solidFill>
+                <a:latin typeface="Pretendard"/>
+                <a:ea typeface="Pretendard"/>
+                <a:cs typeface="Pretendard"/>
+              </a:rPr>
+              <a:t>rest-catalog 볼륨 — 4-2 판</a:t>
+            </a:r>
+          </a:p>
+        </p:txBody>
+      </p:sp>
+      <p:sp>
+        <p:nvSpPr>
+          <p:cNvPr id="20" name="TextBox 19"/>
+          <p:cNvSpPr txBox="1"/>
+          <p:nvPr/>
+        </p:nvSpPr>
+        <p:spPr>
+          <a:xfrm>
+            <a:off x="9772650" y="3467100"/>
+            <a:ext cx="7372350" cy="876300"/>
+          </a:xfrm>
+          <a:prstGeom prst="rect">
+            <a:avLst/>
+          </a:prstGeom>
+          <a:noFill/>
+        </p:spPr>
+        <p:txBody>
+          <a:bodyPr wrap="square" lIns="0" rIns="0" tIns="0" bIns="0" anchor="t">
+            <a:spAutoFit/>
+          </a:bodyPr>
+          <a:lstStyle/>
+          <a:p>
+            <a:pPr algn="l">
+              <a:lnSpc>
+                <a:spcPct val="146000"/>
+              </a:lnSpc>
+            </a:pPr>
+            <a:r>
+              <a:rPr sz="2250" b="0">
+                <a:solidFill>
+                  <a:srgbClr val="3D3D3D"/>
+                </a:solidFill>
+                <a:latin typeface="Pretendard"/>
+                <a:ea typeface="Pretendard"/>
+                <a:cs typeface="Pretendard"/>
+              </a:rPr>
+              <a:t>jdbc:sqlite:file:/home/iceberg/iceberg_catalog.db</a:t>
+            </a:r>
+          </a:p>
+        </p:txBody>
+      </p:sp>
+      <p:sp>
+        <p:nvSpPr>
+          <p:cNvPr id="21" name="Rounded Rectangle 20"/>
+          <p:cNvSpPr/>
+          <p:nvPr/>
+        </p:nvSpPr>
+        <p:spPr>
+          <a:xfrm>
+            <a:off x="9772650" y="4610100"/>
+            <a:ext cx="7372350" cy="2857500"/>
+          </a:xfrm>
+          <a:prstGeom prst="roundRect">
+            <a:avLst>
+              <a:gd name="adj" fmla="val 1666"/>
+            </a:avLst>
           </a:prstGeom>
           <a:solidFill>
             <a:srgbClr val="FAFBFD"/>
@@ -9905,61 +9428,20 @@
       </p:sp>
       <p:sp>
         <p:nvSpPr>
-          <p:cNvPr id="15" name="TextBox 14"/>
-          <p:cNvSpPr txBox="1"/>
-          <p:nvPr/>
-        </p:nvSpPr>
-        <p:spPr>
-          <a:xfrm>
-            <a:off x="2230981" y="3429000"/>
-            <a:ext cx="14761619" cy="571500"/>
-          </a:xfrm>
-          <a:prstGeom prst="rect">
-            <a:avLst/>
-          </a:prstGeom>
-          <a:noFill/>
-        </p:spPr>
-        <p:txBody>
-          <a:bodyPr wrap="square" lIns="0" rIns="0" tIns="0" bIns="0" anchor="ctr">
-            <a:spAutoFit/>
-          </a:bodyPr>
-          <a:lstStyle/>
-          <a:p>
-            <a:pPr algn="l">
-              <a:lnSpc>
-                <a:spcPct val="115000"/>
-              </a:lnSpc>
-            </a:pPr>
-            <a:r>
-              <a:rPr sz="1800" b="0">
-                <a:solidFill>
-                  <a:srgbClr val="3D3D3D"/>
-                </a:solidFill>
-                <a:latin typeface="Pretendard"/>
-                <a:ea typeface="Pretendard"/>
-                <a:cs typeface="Pretendard"/>
-              </a:rPr>
-              <a:t>docker compose up -d</a:t>
-            </a:r>
-          </a:p>
-        </p:txBody>
-      </p:sp>
-      <p:sp>
-        <p:nvSpPr>
-          <p:cNvPr id="16" name="Rectangle 15"/>
-          <p:cNvSpPr/>
-          <p:nvPr/>
-        </p:nvSpPr>
-        <p:spPr>
-          <a:xfrm>
-            <a:off x="1143000" y="4076700"/>
-            <a:ext cx="935581" cy="571500"/>
-          </a:xfrm>
-          <a:prstGeom prst="rect">
-            <a:avLst/>
-          </a:prstGeom>
-          <a:solidFill>
-            <a:srgbClr val="0D2B5E"/>
+          <p:cNvPr id="22" name="Oval 21"/>
+          <p:cNvSpPr/>
+          <p:nvPr/>
+        </p:nvSpPr>
+        <p:spPr>
+          <a:xfrm>
+            <a:off x="10077450" y="5016817"/>
+            <a:ext cx="97155" cy="97155"/>
+          </a:xfrm>
+          <a:prstGeom prst="ellipse">
+            <a:avLst/>
+          </a:prstGeom>
+          <a:solidFill>
+            <a:srgbClr val="1E5BC6"/>
           </a:solidFill>
           <a:ln>
             <a:noFill/>
@@ -9976,14 +9458,14 @@
       </p:sp>
       <p:sp>
         <p:nvSpPr>
-          <p:cNvPr id="17" name="TextBox 16"/>
-          <p:cNvSpPr txBox="1"/>
-          <p:nvPr/>
-        </p:nvSpPr>
-        <p:spPr>
-          <a:xfrm>
-            <a:off x="1143000" y="4076700"/>
-            <a:ext cx="935581" cy="571500"/>
+          <p:cNvPr id="23" name="TextBox 22"/>
+          <p:cNvSpPr txBox="1"/>
+          <p:nvPr/>
+        </p:nvSpPr>
+        <p:spPr>
+          <a:xfrm>
+            <a:off x="10263188" y="4838700"/>
+            <a:ext cx="6634162" cy="453390"/>
           </a:xfrm>
           <a:prstGeom prst="rect">
             <a:avLst/>
@@ -9996,86 +9478,13 @@
           </a:bodyPr>
           <a:lstStyle/>
           <a:p>
-            <a:pPr algn="ctr">
-              <a:lnSpc>
-                <a:spcPct val="100000"/>
-              </a:lnSpc>
-            </a:pPr>
-            <a:r>
-              <a:rPr sz="1800" b="1">
-                <a:solidFill>
-                  <a:srgbClr val="FFFFFF"/>
-                </a:solidFill>
-                <a:latin typeface="Pretendard"/>
-                <a:ea typeface="Pretendard"/>
-                <a:cs typeface="Pretendard"/>
-              </a:rPr>
-              <a:t>상태</a:t>
-            </a:r>
-          </a:p>
-        </p:txBody>
-      </p:sp>
-      <p:sp>
-        <p:nvSpPr>
-          <p:cNvPr id="18" name="Rectangle 17"/>
-          <p:cNvSpPr/>
-          <p:nvPr/>
-        </p:nvSpPr>
-        <p:spPr>
-          <a:xfrm>
-            <a:off x="2078581" y="4076700"/>
-            <a:ext cx="15066419" cy="571500"/>
-          </a:xfrm>
-          <a:prstGeom prst="rect">
-            <a:avLst/>
-          </a:prstGeom>
-          <a:solidFill>
-            <a:srgbClr val="FAFBFD"/>
-          </a:solidFill>
-          <a:ln w="9525">
-            <a:solidFill>
-              <a:srgbClr val="DCE1E8"/>
-            </a:solidFill>
-          </a:ln>
-          <a:effectLst/>
-        </p:spPr>
-        <p:txBody>
-          <a:bodyPr rtlCol="0" anchor="ctr" wrap="square"/>
-          <a:lstStyle/>
-          <a:p>
-            <a:pPr algn="ctr"/>
-          </a:p>
-        </p:txBody>
-      </p:sp>
-      <p:sp>
-        <p:nvSpPr>
-          <p:cNvPr id="19" name="TextBox 18"/>
-          <p:cNvSpPr txBox="1"/>
-          <p:nvPr/>
-        </p:nvSpPr>
-        <p:spPr>
-          <a:xfrm>
-            <a:off x="2230981" y="4076700"/>
-            <a:ext cx="14761619" cy="571500"/>
-          </a:xfrm>
-          <a:prstGeom prst="rect">
-            <a:avLst/>
-          </a:prstGeom>
-          <a:noFill/>
-        </p:spPr>
-        <p:txBody>
-          <a:bodyPr wrap="square" lIns="0" rIns="0" tIns="0" bIns="0" anchor="ctr">
-            <a:spAutoFit/>
-          </a:bodyPr>
-          <a:lstStyle/>
-          <a:p>
             <a:pPr algn="l">
               <a:lnSpc>
-                <a:spcPct val="115000"/>
-              </a:lnSpc>
-            </a:pPr>
-            <a:r>
-              <a:rPr sz="1800" b="0">
+                <a:spcPct val="120000"/>
+              </a:lnSpc>
+            </a:pPr>
+            <a:r>
+              <a:rPr sz="1575" b="0">
                 <a:solidFill>
                   <a:srgbClr val="3D3D3D"/>
                 </a:solidFill>
@@ -10083,27 +9492,27 @@
                 <a:ea typeface="Pretendard"/>
                 <a:cs typeface="Pretendard"/>
               </a:rPr>
-              <a:t>docker compose ps</a:t>
-            </a:r>
-          </a:p>
-        </p:txBody>
-      </p:sp>
-      <p:sp>
-        <p:nvSpPr>
-          <p:cNvPr id="20" name="Rectangle 19"/>
-          <p:cNvSpPr/>
-          <p:nvPr/>
-        </p:nvSpPr>
-        <p:spPr>
-          <a:xfrm>
-            <a:off x="1143000" y="4724400"/>
-            <a:ext cx="935581" cy="571500"/>
-          </a:xfrm>
-          <a:prstGeom prst="rect">
-            <a:avLst/>
-          </a:prstGeom>
-          <a:solidFill>
-            <a:srgbClr val="0D2B5E"/>
+              <a:t>카탈로그 파일이 볼륨에 놓인다</a:t>
+            </a:r>
+          </a:p>
+        </p:txBody>
+      </p:sp>
+      <p:sp>
+        <p:nvSpPr>
+          <p:cNvPr id="24" name="Oval 23"/>
+          <p:cNvSpPr/>
+          <p:nvPr/>
+        </p:nvSpPr>
+        <p:spPr>
+          <a:xfrm>
+            <a:off x="10077450" y="5527358"/>
+            <a:ext cx="97155" cy="97155"/>
+          </a:xfrm>
+          <a:prstGeom prst="ellipse">
+            <a:avLst/>
+          </a:prstGeom>
+          <a:solidFill>
+            <a:srgbClr val="1E5BC6"/>
           </a:solidFill>
           <a:ln>
             <a:noFill/>
@@ -10120,14 +9529,14 @@
       </p:sp>
       <p:sp>
         <p:nvSpPr>
-          <p:cNvPr id="21" name="TextBox 20"/>
-          <p:cNvSpPr txBox="1"/>
-          <p:nvPr/>
-        </p:nvSpPr>
-        <p:spPr>
-          <a:xfrm>
-            <a:off x="1143000" y="4724400"/>
-            <a:ext cx="935581" cy="571500"/>
+          <p:cNvPr id="25" name="TextBox 24"/>
+          <p:cNvSpPr txBox="1"/>
+          <p:nvPr/>
+        </p:nvSpPr>
+        <p:spPr>
+          <a:xfrm>
+            <a:off x="10263188" y="5349240"/>
+            <a:ext cx="6634162" cy="453390"/>
           </a:xfrm>
           <a:prstGeom prst="rect">
             <a:avLst/>
@@ -10140,86 +9549,13 @@
           </a:bodyPr>
           <a:lstStyle/>
           <a:p>
-            <a:pPr algn="ctr">
-              <a:lnSpc>
-                <a:spcPct val="100000"/>
-              </a:lnSpc>
-            </a:pPr>
-            <a:r>
-              <a:rPr sz="1800" b="1">
-                <a:solidFill>
-                  <a:srgbClr val="FFFFFF"/>
-                </a:solidFill>
-                <a:latin typeface="Pretendard"/>
-                <a:ea typeface="Pretendard"/>
-                <a:cs typeface="Pretendard"/>
-              </a:rPr>
-              <a:t>별칭</a:t>
-            </a:r>
-          </a:p>
-        </p:txBody>
-      </p:sp>
-      <p:sp>
-        <p:nvSpPr>
-          <p:cNvPr id="22" name="Rectangle 21"/>
-          <p:cNvSpPr/>
-          <p:nvPr/>
-        </p:nvSpPr>
-        <p:spPr>
-          <a:xfrm>
-            <a:off x="2078581" y="4724400"/>
-            <a:ext cx="15066419" cy="571500"/>
-          </a:xfrm>
-          <a:prstGeom prst="rect">
-            <a:avLst/>
-          </a:prstGeom>
-          <a:solidFill>
-            <a:srgbClr val="FAFBFD"/>
-          </a:solidFill>
-          <a:ln w="9525">
-            <a:solidFill>
-              <a:srgbClr val="DCE1E8"/>
-            </a:solidFill>
-          </a:ln>
-          <a:effectLst/>
-        </p:spPr>
-        <p:txBody>
-          <a:bodyPr rtlCol="0" anchor="ctr" wrap="square"/>
-          <a:lstStyle/>
-          <a:p>
-            <a:pPr algn="ctr"/>
-          </a:p>
-        </p:txBody>
-      </p:sp>
-      <p:sp>
-        <p:nvSpPr>
-          <p:cNvPr id="23" name="TextBox 22"/>
-          <p:cNvSpPr txBox="1"/>
-          <p:nvPr/>
-        </p:nvSpPr>
-        <p:spPr>
-          <a:xfrm>
-            <a:off x="2230981" y="4724400"/>
-            <a:ext cx="14761619" cy="571500"/>
-          </a:xfrm>
-          <a:prstGeom prst="rect">
-            <a:avLst/>
-          </a:prstGeom>
-          <a:noFill/>
-        </p:spPr>
-        <p:txBody>
-          <a:bodyPr wrap="square" lIns="0" rIns="0" tIns="0" bIns="0" anchor="ctr">
-            <a:spAutoFit/>
-          </a:bodyPr>
-          <a:lstStyle/>
-          <a:p>
             <a:pPr algn="l">
               <a:lnSpc>
-                <a:spcPct val="115000"/>
-              </a:lnSpc>
-            </a:pPr>
-            <a:r>
-              <a:rPr sz="1800" b="0">
+                <a:spcPct val="120000"/>
+              </a:lnSpc>
+            </a:pPr>
+            <a:r>
+              <a:rPr sz="1575" b="0">
                 <a:solidFill>
                   <a:srgbClr val="3D3D3D"/>
                 </a:solidFill>
@@ -10227,27 +9563,27 @@
                 <a:ea typeface="Pretendard"/>
                 <a:cs typeface="Pretendard"/>
               </a:rPr>
-              <a:t>exec mc mc alias set local http://minio:9000 minioadmin minioadmin</a:t>
-            </a:r>
-          </a:p>
-        </p:txBody>
-      </p:sp>
-      <p:sp>
-        <p:nvSpPr>
-          <p:cNvPr id="24" name="Rectangle 23"/>
-          <p:cNvSpPr/>
-          <p:nvPr/>
-        </p:nvSpPr>
-        <p:spPr>
-          <a:xfrm>
-            <a:off x="1143000" y="5372100"/>
-            <a:ext cx="935581" cy="571500"/>
-          </a:xfrm>
-          <a:prstGeom prst="rect">
-            <a:avLst/>
-          </a:prstGeom>
-          <a:solidFill>
-            <a:srgbClr val="0D2B5E"/>
+              <a:t>down → up 뒤에도 count 4 유지(실측)</a:t>
+            </a:r>
+          </a:p>
+        </p:txBody>
+      </p:sp>
+      <p:sp>
+        <p:nvSpPr>
+          <p:cNvPr id="26" name="Oval 25"/>
+          <p:cNvSpPr/>
+          <p:nvPr/>
+        </p:nvSpPr>
+        <p:spPr>
+          <a:xfrm>
+            <a:off x="10077450" y="6037898"/>
+            <a:ext cx="97155" cy="97155"/>
+          </a:xfrm>
+          <a:prstGeom prst="ellipse">
+            <a:avLst/>
+          </a:prstGeom>
+          <a:solidFill>
+            <a:srgbClr val="1E5BC6"/>
           </a:solidFill>
           <a:ln>
             <a:noFill/>
@@ -10264,14 +9600,14 @@
       </p:sp>
       <p:sp>
         <p:nvSpPr>
-          <p:cNvPr id="25" name="TextBox 24"/>
-          <p:cNvSpPr txBox="1"/>
-          <p:nvPr/>
-        </p:nvSpPr>
-        <p:spPr>
-          <a:xfrm>
-            <a:off x="1143000" y="5372100"/>
-            <a:ext cx="935581" cy="571500"/>
+          <p:cNvPr id="27" name="TextBox 26"/>
+          <p:cNvSpPr txBox="1"/>
+          <p:nvPr/>
+        </p:nvSpPr>
+        <p:spPr>
+          <a:xfrm>
+            <a:off x="10263188" y="5859780"/>
+            <a:ext cx="6634162" cy="453390"/>
           </a:xfrm>
           <a:prstGeom prst="rect">
             <a:avLst/>
@@ -10284,13 +9620,84 @@
           </a:bodyPr>
           <a:lstStyle/>
           <a:p>
+            <a:pPr algn="l">
+              <a:lnSpc>
+                <a:spcPct val="120000"/>
+              </a:lnSpc>
+            </a:pPr>
+            <a:r>
+              <a:rPr sz="1575" b="0">
+                <a:solidFill>
+                  <a:srgbClr val="3D3D3D"/>
+                </a:solidFill>
+                <a:latin typeface="Pretendard"/>
+                <a:ea typeface="Pretendard"/>
+                <a:cs typeface="Pretendard"/>
+              </a:rPr>
+              <a:t>정리 시간에 down → up 으로 확인</a:t>
+            </a:r>
+          </a:p>
+        </p:txBody>
+      </p:sp>
+      <p:sp>
+        <p:nvSpPr>
+          <p:cNvPr id="28" name="Oval 27"/>
+          <p:cNvSpPr/>
+          <p:nvPr/>
+        </p:nvSpPr>
+        <p:spPr>
+          <a:xfrm>
+            <a:off x="8686800" y="3771900"/>
+            <a:ext cx="914400" cy="914400"/>
+          </a:xfrm>
+          <a:prstGeom prst="ellipse">
+            <a:avLst/>
+          </a:prstGeom>
+          <a:solidFill>
+            <a:srgbClr val="0D2B5E"/>
+          </a:solidFill>
+          <a:ln>
+            <a:noFill/>
+          </a:ln>
+          <a:effectLst/>
+        </p:spPr>
+        <p:txBody>
+          <a:bodyPr rtlCol="0" anchor="ctr" wrap="square"/>
+          <a:lstStyle/>
+          <a:p>
+            <a:pPr algn="ctr"/>
+          </a:p>
+        </p:txBody>
+      </p:sp>
+      <p:sp>
+        <p:nvSpPr>
+          <p:cNvPr id="29" name="TextBox 28"/>
+          <p:cNvSpPr txBox="1"/>
+          <p:nvPr/>
+        </p:nvSpPr>
+        <p:spPr>
+          <a:xfrm>
+            <a:off x="8686800" y="4057650"/>
+            <a:ext cx="914400" cy="381000"/>
+          </a:xfrm>
+          <a:prstGeom prst="rect">
+            <a:avLst/>
+          </a:prstGeom>
+          <a:noFill/>
+        </p:spPr>
+        <p:txBody>
+          <a:bodyPr wrap="square" lIns="0" rIns="0" tIns="0" bIns="0" anchor="t">
+            <a:spAutoFit/>
+          </a:bodyPr>
+          <a:lstStyle/>
+          <a:p>
             <a:pPr algn="ctr">
               <a:lnSpc>
                 <a:spcPct val="100000"/>
               </a:lnSpc>
             </a:pPr>
             <a:r>
-              <a:rPr sz="1800" b="1">
+              <a:rPr sz="2250" b="1">
                 <a:solidFill>
                   <a:srgbClr val="FFFFFF"/>
                 </a:solidFill>
@@ -10298,128 +9705,14 @@
                 <a:ea typeface="Pretendard"/>
                 <a:cs typeface="Pretendard"/>
               </a:rPr>
-              <a:t>버킷</a:t>
-            </a:r>
-          </a:p>
-        </p:txBody>
-      </p:sp>
-      <p:sp>
-        <p:nvSpPr>
-          <p:cNvPr id="26" name="Rectangle 25"/>
-          <p:cNvSpPr/>
-          <p:nvPr/>
-        </p:nvSpPr>
-        <p:spPr>
-          <a:xfrm>
-            <a:off x="2078581" y="5372100"/>
-            <a:ext cx="15066419" cy="571500"/>
-          </a:xfrm>
-          <a:prstGeom prst="rect">
-            <a:avLst/>
-          </a:prstGeom>
-          <a:solidFill>
-            <a:srgbClr val="FAFBFD"/>
-          </a:solidFill>
-          <a:ln w="9525">
-            <a:solidFill>
-              <a:srgbClr val="DCE1E8"/>
-            </a:solidFill>
-          </a:ln>
-          <a:effectLst/>
-        </p:spPr>
-        <p:txBody>
-          <a:bodyPr rtlCol="0" anchor="ctr" wrap="square"/>
-          <a:lstStyle/>
-          <a:p>
-            <a:pPr algn="ctr"/>
-          </a:p>
-        </p:txBody>
-      </p:sp>
-      <p:sp>
-        <p:nvSpPr>
-          <p:cNvPr id="27" name="TextBox 26"/>
-          <p:cNvSpPr txBox="1"/>
-          <p:nvPr/>
-        </p:nvSpPr>
-        <p:spPr>
-          <a:xfrm>
-            <a:off x="2230981" y="5372100"/>
-            <a:ext cx="14761619" cy="571500"/>
-          </a:xfrm>
-          <a:prstGeom prst="rect">
-            <a:avLst/>
-          </a:prstGeom>
-          <a:noFill/>
-        </p:spPr>
-        <p:txBody>
-          <a:bodyPr wrap="square" lIns="0" rIns="0" tIns="0" bIns="0" anchor="ctr">
-            <a:spAutoFit/>
-          </a:bodyPr>
-          <a:lstStyle/>
-          <a:p>
-            <a:pPr algn="l">
-              <a:lnSpc>
-                <a:spcPct val="115000"/>
-              </a:lnSpc>
-            </a:pPr>
-            <a:r>
-              <a:rPr sz="1800" b="0">
-                <a:solidFill>
-                  <a:srgbClr val="3D3D3D"/>
-                </a:solidFill>
-                <a:latin typeface="Pretendard"/>
-                <a:ea typeface="Pretendard"/>
-                <a:cs typeface="Pretendard"/>
-              </a:rPr>
-              <a:t>exec mc mc mb -p local/warehouse</a:t>
-            </a:r>
-          </a:p>
-        </p:txBody>
-      </p:sp>
-      <p:sp>
-        <p:nvSpPr>
-          <p:cNvPr id="28" name="TextBox 27"/>
-          <p:cNvSpPr txBox="1"/>
-          <p:nvPr/>
-        </p:nvSpPr>
-        <p:spPr>
-          <a:xfrm>
-            <a:off x="1143000" y="7620000"/>
-            <a:ext cx="16002000" cy="342900"/>
-          </a:xfrm>
-          <a:prstGeom prst="rect">
-            <a:avLst/>
-          </a:prstGeom>
-          <a:noFill/>
-        </p:spPr>
-        <p:txBody>
-          <a:bodyPr wrap="square" lIns="0" rIns="0" tIns="0" bIns="0" anchor="t">
-            <a:spAutoFit/>
-          </a:bodyPr>
-          <a:lstStyle/>
-          <a:p>
-            <a:pPr algn="l">
-              <a:lnSpc>
-                <a:spcPct val="100000"/>
-              </a:lnSpc>
-            </a:pPr>
-            <a:r>
-              <a:rPr sz="1875" b="1">
-                <a:solidFill>
-                  <a:srgbClr val="7D7D7D"/>
-                </a:solidFill>
-                <a:latin typeface="Pretendard"/>
-                <a:ea typeface="Pretendard"/>
-                <a:cs typeface="Pretendard"/>
-              </a:rPr>
-              <a:t>확인 포인트: 네 컨테이너(minio·mc·iceberg-rest·spark-iceberg)가 모두 Up 이고 warehouse 버킷이 만들어진다</a:t>
-            </a:r>
-          </a:p>
-        </p:txBody>
-      </p:sp>
-      <p:sp>
-        <p:nvSpPr>
-          <p:cNvPr id="29" name="Rectangle 28"/>
+              <a:t>VS</a:t>
+            </a:r>
+          </a:p>
+        </p:txBody>
+      </p:sp>
+      <p:sp>
+        <p:nvSpPr>
+          <p:cNvPr id="30" name="Rectangle 29"/>
           <p:cNvSpPr/>
           <p:nvPr/>
         </p:nvSpPr>
@@ -10449,7 +9742,7 @@
       </p:sp>
       <p:sp>
         <p:nvSpPr>
-          <p:cNvPr id="30" name="TextBox 29"/>
+          <p:cNvPr id="31" name="TextBox 30"/>
           <p:cNvSpPr txBox="1"/>
           <p:nvPr/>
         </p:nvSpPr>
@@ -10490,7 +9783,7 @@
       </p:sp>
       <p:sp>
         <p:nvSpPr>
-          <p:cNvPr id="31" name="TextBox 30"/>
+          <p:cNvPr id="32" name="TextBox 31"/>
           <p:cNvSpPr txBox="1"/>
           <p:nvPr/>
         </p:nvSpPr>
@@ -10714,7 +10007,7 @@
                 <a:ea typeface="Pretendard"/>
                 <a:cs typeface="Pretendard"/>
               </a:rPr>
-              <a:t>컨테이너가 넷 — 문제를 좁히려면 하나씩 확인한다</a:t>
+              <a:t>컨테이너가 넷 — 하나씩 확인해 문제를 좁힌다</a:t>
             </a:r>
           </a:p>
         </p:txBody>
@@ -10931,7 +10224,7 @@
                 <a:ea typeface="Pretendard"/>
                 <a:cs typeface="Pretendard"/>
               </a:rPr>
-              <a:t>http_code 가 200 이면 산 것</a:t>
+              <a:t>minio: 200</a:t>
             </a:r>
           </a:p>
         </p:txBody>
@@ -11118,7 +10411,7 @@
                 <a:ea typeface="Pretendard"/>
                 <a:cs typeface="Pretendard"/>
               </a:rPr>
-              <a:t>defaults · overrides 키가 든 설정 JSON 을 돌려준다</a:t>
+              <a:t>{"defaults":{},"overrides":{}}</a:t>
             </a:r>
           </a:p>
         </p:txBody>
@@ -11305,7 +10598,7 @@
                 <a:ea typeface="Pretendard"/>
                 <a:cs typeface="Pretendard"/>
               </a:rPr>
-              <a:t>버전이 출력되면 기반 준비 끝</a:t>
+              <a:t>로고 아래 version 3.5.5</a:t>
             </a:r>
           </a:p>
         </p:txBody>
@@ -11318,12 +10611,199 @@
         </p:nvSpPr>
         <p:spPr>
           <a:xfrm>
-            <a:off x="13144500" y="2933700"/>
-            <a:ext cx="4000500" cy="3629025"/>
+            <a:off x="1143000" y="6734175"/>
+            <a:ext cx="11430000" cy="1095375"/>
           </a:xfrm>
           <a:prstGeom prst="roundRect">
             <a:avLst>
-              <a:gd name="adj" fmla="val 1312"/>
+              <a:gd name="adj" fmla="val 4347"/>
+            </a:avLst>
+          </a:prstGeom>
+          <a:solidFill>
+            <a:srgbClr val="FAFBFD"/>
+          </a:solidFill>
+          <a:ln w="9525">
+            <a:solidFill>
+              <a:srgbClr val="DCE1E8"/>
+            </a:solidFill>
+          </a:ln>
+          <a:effectLst/>
+        </p:spPr>
+        <p:txBody>
+          <a:bodyPr rtlCol="0" anchor="ctr" wrap="square"/>
+          <a:lstStyle/>
+          <a:p>
+            <a:pPr algn="ctr"/>
+          </a:p>
+        </p:txBody>
+      </p:sp>
+      <p:sp>
+        <p:nvSpPr>
+          <p:cNvPr id="24" name="Oval 23"/>
+          <p:cNvSpPr/>
+          <p:nvPr/>
+        </p:nvSpPr>
+        <p:spPr>
+          <a:xfrm>
+            <a:off x="1447800" y="6981825"/>
+            <a:ext cx="590550" cy="590550"/>
+          </a:xfrm>
+          <a:prstGeom prst="ellipse">
+            <a:avLst/>
+          </a:prstGeom>
+          <a:solidFill>
+            <a:srgbClr val="0D2B5E"/>
+          </a:solidFill>
+          <a:ln>
+            <a:noFill/>
+          </a:ln>
+          <a:effectLst/>
+        </p:spPr>
+        <p:txBody>
+          <a:bodyPr rtlCol="0" anchor="ctr" wrap="square"/>
+          <a:lstStyle/>
+          <a:p>
+            <a:pPr algn="ctr"/>
+          </a:p>
+        </p:txBody>
+      </p:sp>
+      <p:sp>
+        <p:nvSpPr>
+          <p:cNvPr id="25" name="TextBox 24"/>
+          <p:cNvSpPr txBox="1"/>
+          <p:nvPr/>
+        </p:nvSpPr>
+        <p:spPr>
+          <a:xfrm>
+            <a:off x="1447800" y="7134225"/>
+            <a:ext cx="590550" cy="323850"/>
+          </a:xfrm>
+          <a:prstGeom prst="rect">
+            <a:avLst/>
+          </a:prstGeom>
+          <a:noFill/>
+        </p:spPr>
+        <p:txBody>
+          <a:bodyPr wrap="square" lIns="0" rIns="0" tIns="0" bIns="0" anchor="t">
+            <a:spAutoFit/>
+          </a:bodyPr>
+          <a:lstStyle/>
+          <a:p>
+            <a:pPr algn="ctr">
+              <a:lnSpc>
+                <a:spcPct val="100000"/>
+              </a:lnSpc>
+            </a:pPr>
+            <a:r>
+              <a:rPr sz="2250" b="1">
+                <a:solidFill>
+                  <a:srgbClr val="FFFFFF"/>
+                </a:solidFill>
+                <a:latin typeface="Pretendard"/>
+                <a:ea typeface="Pretendard"/>
+                <a:cs typeface="Pretendard"/>
+              </a:rPr>
+              <a:t>4</a:t>
+            </a:r>
+          </a:p>
+        </p:txBody>
+      </p:sp>
+      <p:sp>
+        <p:nvSpPr>
+          <p:cNvPr id="26" name="TextBox 25"/>
+          <p:cNvSpPr txBox="1"/>
+          <p:nvPr/>
+        </p:nvSpPr>
+        <p:spPr>
+          <a:xfrm>
+            <a:off x="2324100" y="6943725"/>
+            <a:ext cx="9906000" cy="400050"/>
+          </a:xfrm>
+          <a:prstGeom prst="rect">
+            <a:avLst/>
+          </a:prstGeom>
+          <a:noFill/>
+        </p:spPr>
+        <p:txBody>
+          <a:bodyPr wrap="square" lIns="0" rIns="0" tIns="0" bIns="0" anchor="t">
+            <a:spAutoFit/>
+          </a:bodyPr>
+          <a:lstStyle/>
+          <a:p>
+            <a:pPr algn="l">
+              <a:lnSpc>
+                <a:spcPct val="110000"/>
+              </a:lnSpc>
+            </a:pPr>
+            <a:r>
+              <a:rPr sz="2475" b="1">
+                <a:solidFill>
+                  <a:srgbClr val="0D2B5E"/>
+                </a:solidFill>
+                <a:latin typeface="Pretendard"/>
+                <a:ea typeface="Pretendard"/>
+                <a:cs typeface="Pretendard"/>
+              </a:rPr>
+              <a:t>카탈로그 위치 — logs rest | grep uri</a:t>
+            </a:r>
+          </a:p>
+        </p:txBody>
+      </p:sp>
+      <p:sp>
+        <p:nvSpPr>
+          <p:cNvPr id="27" name="TextBox 26"/>
+          <p:cNvSpPr txBox="1"/>
+          <p:nvPr/>
+        </p:nvSpPr>
+        <p:spPr>
+          <a:xfrm>
+            <a:off x="2324100" y="7343775"/>
+            <a:ext cx="9906000" cy="361950"/>
+          </a:xfrm>
+          <a:prstGeom prst="rect">
+            <a:avLst/>
+          </a:prstGeom>
+          <a:noFill/>
+        </p:spPr>
+        <p:txBody>
+          <a:bodyPr wrap="square" lIns="0" rIns="0" tIns="0" bIns="0" anchor="t">
+            <a:spAutoFit/>
+          </a:bodyPr>
+          <a:lstStyle/>
+          <a:p>
+            <a:pPr algn="l">
+              <a:lnSpc>
+                <a:spcPct val="120000"/>
+              </a:lnSpc>
+            </a:pPr>
+            <a:r>
+              <a:rPr sz="2025" b="0">
+                <a:solidFill>
+                  <a:srgbClr val="3D3D3D"/>
+                </a:solidFill>
+                <a:latin typeface="Pretendard"/>
+                <a:ea typeface="Pretendard"/>
+                <a:cs typeface="Pretendard"/>
+              </a:rPr>
+              <a:t>uri=jdbc:sqlite:file:/home/iceberg/iceberg_catalog.db</a:t>
+            </a:r>
+          </a:p>
+        </p:txBody>
+      </p:sp>
+      <p:sp>
+        <p:nvSpPr>
+          <p:cNvPr id="28" name="Rounded Rectangle 27"/>
+          <p:cNvSpPr/>
+          <p:nvPr/>
+        </p:nvSpPr>
+        <p:spPr>
+          <a:xfrm>
+            <a:off x="13144500" y="2933700"/>
+            <a:ext cx="4000500" cy="4895850"/>
+          </a:xfrm>
+          <a:prstGeom prst="roundRect">
+            <a:avLst>
+              <a:gd name="adj" fmla="val 1190"/>
             </a:avLst>
           </a:prstGeom>
           <a:solidFill>
@@ -11346,13 +10826,13 @@
       </p:sp>
       <p:sp>
         <p:nvSpPr>
-          <p:cNvPr id="24" name="TextBox 23"/>
-          <p:cNvSpPr txBox="1"/>
-          <p:nvPr/>
-        </p:nvSpPr>
-        <p:spPr>
-          <a:xfrm>
-            <a:off x="13487400" y="3929062"/>
+          <p:cNvPr id="29" name="TextBox 28"/>
+          <p:cNvSpPr txBox="1"/>
+          <p:nvPr/>
+        </p:nvSpPr>
+        <p:spPr>
+          <a:xfrm>
+            <a:off x="13487400" y="4562475"/>
             <a:ext cx="3314700" cy="304800"/>
           </a:xfrm>
           <a:prstGeom prst="rect">
@@ -11380,20 +10860,20 @@
                 <a:ea typeface="Pretendard"/>
                 <a:cs typeface="Pretendard"/>
               </a:rPr>
-              <a:t>오류 없는지</a:t>
-            </a:r>
-          </a:p>
-        </p:txBody>
-      </p:sp>
-      <p:sp>
-        <p:nvSpPr>
-          <p:cNvPr id="25" name="TextBox 24"/>
-          <p:cNvSpPr txBox="1"/>
-          <p:nvPr/>
-        </p:nvSpPr>
-        <p:spPr>
-          <a:xfrm>
-            <a:off x="13487400" y="4329112"/>
+              <a:t>로그 끝 줄</a:t>
+            </a:r>
+          </a:p>
+        </p:txBody>
+      </p:sp>
+      <p:sp>
+        <p:nvSpPr>
+          <p:cNvPr id="30" name="TextBox 29"/>
+          <p:cNvSpPr txBox="1"/>
+          <p:nvPr/>
+        </p:nvSpPr>
+        <p:spPr>
+          <a:xfrm>
+            <a:off x="13487400" y="4962525"/>
             <a:ext cx="3314700" cy="1238250"/>
           </a:xfrm>
           <a:prstGeom prst="rect">
@@ -11421,7 +10901,7 @@
                 <a:ea typeface="Pretendard"/>
                 <a:cs typeface="Pretendard"/>
               </a:rPr>
-              <a:t>compose</a:t>
+              <a:t>Started</a:t>
             </a:r>
           </a:p>
           <a:p>
@@ -11439,14 +10919,14 @@
                 <a:ea typeface="Pretendard"/>
                 <a:cs typeface="Pretendard"/>
               </a:rPr>
-              <a:t>logs rest</a:t>
-            </a:r>
-          </a:p>
-        </p:txBody>
-      </p:sp>
-      <p:sp>
-        <p:nvSpPr>
-          <p:cNvPr id="26" name="Rectangle 25"/>
+              <a:t>@…ms</a:t>
+            </a:r>
+          </a:p>
+        </p:txBody>
+      </p:sp>
+      <p:sp>
+        <p:nvSpPr>
+          <p:cNvPr id="31" name="Rectangle 30"/>
           <p:cNvSpPr/>
           <p:nvPr/>
         </p:nvSpPr>
@@ -11476,7 +10956,7 @@
       </p:sp>
       <p:sp>
         <p:nvSpPr>
-          <p:cNvPr id="27" name="TextBox 26"/>
+          <p:cNvPr id="32" name="TextBox 31"/>
           <p:cNvSpPr txBox="1"/>
           <p:nvPr/>
         </p:nvSpPr>
@@ -11517,7 +10997,7 @@
       </p:sp>
       <p:sp>
         <p:nvSpPr>
-          <p:cNvPr id="28" name="TextBox 27"/>
+          <p:cNvPr id="33" name="TextBox 32"/>
           <p:cNvSpPr txBox="1"/>
           <p:nvPr/>
         </p:nvSpPr>
@@ -11927,11 +11407,11 @@
         <p:spPr>
           <a:xfrm>
             <a:off x="1143000" y="3448050"/>
-            <a:ext cx="8282940" cy="647700"/>
+            <a:ext cx="8282940" cy="619125"/>
           </a:xfrm>
           <a:prstGeom prst="roundRect">
             <a:avLst>
-              <a:gd name="adj" fmla="val 5882"/>
+              <a:gd name="adj" fmla="val 6153"/>
             </a:avLst>
           </a:prstGeom>
           <a:solidFill>
@@ -11961,7 +11441,7 @@
         <p:spPr>
           <a:xfrm>
             <a:off x="1238250" y="3448050"/>
-            <a:ext cx="8092440" cy="647700"/>
+            <a:ext cx="8092440" cy="619125"/>
           </a:xfrm>
           <a:prstGeom prst="rect">
             <a:avLst/>
@@ -12002,11 +11482,11 @@
         <p:spPr>
           <a:xfrm>
             <a:off x="9464040" y="3448050"/>
-            <a:ext cx="7680960" cy="647700"/>
+            <a:ext cx="7680960" cy="619125"/>
           </a:xfrm>
           <a:prstGeom prst="roundRect">
             <a:avLst>
-              <a:gd name="adj" fmla="val 5882"/>
+              <a:gd name="adj" fmla="val 6153"/>
             </a:avLst>
           </a:prstGeom>
           <a:solidFill>
@@ -12036,7 +11516,7 @@
         <p:spPr>
           <a:xfrm>
             <a:off x="9559290" y="3448050"/>
-            <a:ext cx="7490460" cy="647700"/>
+            <a:ext cx="7490460" cy="619125"/>
           </a:xfrm>
           <a:prstGeom prst="rect">
             <a:avLst/>
@@ -12076,12 +11556,12 @@
         </p:nvSpPr>
         <p:spPr>
           <a:xfrm>
-            <a:off x="1143000" y="4171950"/>
-            <a:ext cx="8282940" cy="647700"/>
+            <a:off x="1143000" y="4143375"/>
+            <a:ext cx="8282940" cy="619125"/>
           </a:xfrm>
           <a:prstGeom prst="roundRect">
             <a:avLst>
-              <a:gd name="adj" fmla="val 5882"/>
+              <a:gd name="adj" fmla="val 6153"/>
             </a:avLst>
           </a:prstGeom>
           <a:solidFill>
@@ -12110,8 +11590,8 @@
         </p:nvSpPr>
         <p:spPr>
           <a:xfrm>
-            <a:off x="1238250" y="4171950"/>
-            <a:ext cx="8092440" cy="647700"/>
+            <a:off x="1238250" y="4143375"/>
+            <a:ext cx="8092440" cy="619125"/>
           </a:xfrm>
           <a:prstGeom prst="rect">
             <a:avLst/>
@@ -12138,7 +11618,7 @@
                 <a:ea typeface="Pretendard"/>
                 <a:cs typeface="Pretendard"/>
               </a:rPr>
-              <a:t>…demo.type=rest</a:t>
+              <a:t>…demo.type rest</a:t>
             </a:r>
           </a:p>
         </p:txBody>
@@ -12151,12 +11631,12 @@
         </p:nvSpPr>
         <p:spPr>
           <a:xfrm>
-            <a:off x="9464040" y="4171950"/>
-            <a:ext cx="7680960" cy="647700"/>
+            <a:off x="9464040" y="4143375"/>
+            <a:ext cx="7680960" cy="619125"/>
           </a:xfrm>
           <a:prstGeom prst="roundRect">
             <a:avLst>
-              <a:gd name="adj" fmla="val 5882"/>
+              <a:gd name="adj" fmla="val 6153"/>
             </a:avLst>
           </a:prstGeom>
           <a:solidFill>
@@ -12185,8 +11665,8 @@
         </p:nvSpPr>
         <p:spPr>
           <a:xfrm>
-            <a:off x="9559290" y="4171950"/>
-            <a:ext cx="7490460" cy="647700"/>
+            <a:off x="9559290" y="4143375"/>
+            <a:ext cx="7490460" cy="619125"/>
           </a:xfrm>
           <a:prstGeom prst="rect">
             <a:avLst/>
@@ -12226,12 +11706,12 @@
         </p:nvSpPr>
         <p:spPr>
           <a:xfrm>
-            <a:off x="1143000" y="4895850"/>
-            <a:ext cx="8282940" cy="647700"/>
+            <a:off x="1143000" y="4838700"/>
+            <a:ext cx="8282940" cy="619125"/>
           </a:xfrm>
           <a:prstGeom prst="roundRect">
             <a:avLst>
-              <a:gd name="adj" fmla="val 5882"/>
+              <a:gd name="adj" fmla="val 6153"/>
             </a:avLst>
           </a:prstGeom>
           <a:solidFill>
@@ -12260,8 +11740,8 @@
         </p:nvSpPr>
         <p:spPr>
           <a:xfrm>
-            <a:off x="1238250" y="4895850"/>
-            <a:ext cx="8092440" cy="647700"/>
+            <a:off x="1238250" y="4838700"/>
+            <a:ext cx="8092440" cy="619125"/>
           </a:xfrm>
           <a:prstGeom prst="rect">
             <a:avLst/>
@@ -12288,7 +11768,7 @@
                 <a:ea typeface="Pretendard"/>
                 <a:cs typeface="Pretendard"/>
               </a:rPr>
-              <a:t>…demo.uri=http://rest:8181</a:t>
+              <a:t>…demo.uri http://rest:8181</a:t>
             </a:r>
           </a:p>
         </p:txBody>
@@ -12301,12 +11781,12 @@
         </p:nvSpPr>
         <p:spPr>
           <a:xfrm>
-            <a:off x="9464040" y="4895850"/>
-            <a:ext cx="7680960" cy="647700"/>
+            <a:off x="9464040" y="4838700"/>
+            <a:ext cx="7680960" cy="619125"/>
           </a:xfrm>
           <a:prstGeom prst="roundRect">
             <a:avLst>
-              <a:gd name="adj" fmla="val 5882"/>
+              <a:gd name="adj" fmla="val 6153"/>
             </a:avLst>
           </a:prstGeom>
           <a:solidFill>
@@ -12335,8 +11815,8 @@
         </p:nvSpPr>
         <p:spPr>
           <a:xfrm>
-            <a:off x="9559290" y="4895850"/>
-            <a:ext cx="7490460" cy="647700"/>
+            <a:off x="9559290" y="4838700"/>
+            <a:ext cx="7490460" cy="619125"/>
           </a:xfrm>
           <a:prstGeom prst="rect">
             <a:avLst/>
@@ -12376,12 +11856,12 @@
         </p:nvSpPr>
         <p:spPr>
           <a:xfrm>
-            <a:off x="1143000" y="5619750"/>
-            <a:ext cx="8282940" cy="647700"/>
+            <a:off x="1143000" y="5534025"/>
+            <a:ext cx="8282940" cy="619125"/>
           </a:xfrm>
           <a:prstGeom prst="roundRect">
             <a:avLst>
-              <a:gd name="adj" fmla="val 5882"/>
+              <a:gd name="adj" fmla="val 6153"/>
             </a:avLst>
           </a:prstGeom>
           <a:solidFill>
@@ -12410,8 +11890,8 @@
         </p:nvSpPr>
         <p:spPr>
           <a:xfrm>
-            <a:off x="1238250" y="5619750"/>
-            <a:ext cx="8092440" cy="647700"/>
+            <a:off x="1238250" y="5534025"/>
+            <a:ext cx="8092440" cy="619125"/>
           </a:xfrm>
           <a:prstGeom prst="rect">
             <a:avLst/>
@@ -12438,7 +11918,7 @@
                 <a:ea typeface="Pretendard"/>
                 <a:cs typeface="Pretendard"/>
               </a:rPr>
-              <a:t>…demo.warehouse=s3://warehouse/</a:t>
+              <a:t>…demo.s3.endpoint http://minio:9000</a:t>
             </a:r>
           </a:p>
         </p:txBody>
@@ -12451,12 +11931,12 @@
         </p:nvSpPr>
         <p:spPr>
           <a:xfrm>
-            <a:off x="9464040" y="5619750"/>
-            <a:ext cx="7680960" cy="647700"/>
+            <a:off x="9464040" y="5534025"/>
+            <a:ext cx="7680960" cy="619125"/>
           </a:xfrm>
           <a:prstGeom prst="roundRect">
             <a:avLst>
-              <a:gd name="adj" fmla="val 5882"/>
+              <a:gd name="adj" fmla="val 6153"/>
             </a:avLst>
           </a:prstGeom>
           <a:solidFill>
@@ -12485,8 +11965,8 @@
         </p:nvSpPr>
         <p:spPr>
           <a:xfrm>
-            <a:off x="9559290" y="5619750"/>
-            <a:ext cx="7490460" cy="647700"/>
+            <a:off x="9559290" y="5534025"/>
+            <a:ext cx="7490460" cy="619125"/>
           </a:xfrm>
           <a:prstGeom prst="rect">
             <a:avLst/>
@@ -12513,7 +11993,7 @@
                 <a:ea typeface="Pretendard"/>
                 <a:cs typeface="Pretendard"/>
               </a:rPr>
-              <a:t>테이블 파일이 놓일 자리</a:t>
+              <a:t>S3 API 주소 (MinIO)</a:t>
             </a:r>
           </a:p>
         </p:txBody>
@@ -12526,12 +12006,12 @@
         </p:nvSpPr>
         <p:spPr>
           <a:xfrm>
-            <a:off x="1143000" y="6343650"/>
-            <a:ext cx="8282940" cy="647700"/>
+            <a:off x="1143000" y="6229350"/>
+            <a:ext cx="8282940" cy="619125"/>
           </a:xfrm>
           <a:prstGeom prst="roundRect">
             <a:avLst>
-              <a:gd name="adj" fmla="val 5882"/>
+              <a:gd name="adj" fmla="val 6153"/>
             </a:avLst>
           </a:prstGeom>
           <a:solidFill>
@@ -12560,8 +12040,8 @@
         </p:nvSpPr>
         <p:spPr>
           <a:xfrm>
-            <a:off x="1238250" y="6343650"/>
-            <a:ext cx="8092440" cy="647700"/>
+            <a:off x="1238250" y="6229350"/>
+            <a:ext cx="8092440" cy="619125"/>
           </a:xfrm>
           <a:prstGeom prst="rect">
             <a:avLst/>
@@ -12588,7 +12068,7 @@
                 <a:ea typeface="Pretendard"/>
                 <a:cs typeface="Pretendard"/>
               </a:rPr>
-              <a:t>…demo.s3.endpoint=http://minio:9000</a:t>
+              <a:t>…demo.warehouse s3://warehouse/wh/</a:t>
             </a:r>
           </a:p>
         </p:txBody>
@@ -12601,12 +12081,12 @@
         </p:nvSpPr>
         <p:spPr>
           <a:xfrm>
-            <a:off x="9464040" y="6343650"/>
-            <a:ext cx="7680960" cy="647700"/>
+            <a:off x="9464040" y="6229350"/>
+            <a:ext cx="7680960" cy="619125"/>
           </a:xfrm>
           <a:prstGeom prst="roundRect">
             <a:avLst>
-              <a:gd name="adj" fmla="val 5882"/>
+              <a:gd name="adj" fmla="val 6153"/>
             </a:avLst>
           </a:prstGeom>
           <a:solidFill>
@@ -12635,8 +12115,8 @@
         </p:nvSpPr>
         <p:spPr>
           <a:xfrm>
-            <a:off x="9559290" y="6343650"/>
-            <a:ext cx="7490460" cy="647700"/>
+            <a:off x="9559290" y="6229350"/>
+            <a:ext cx="7490460" cy="619125"/>
           </a:xfrm>
           <a:prstGeom prst="rect">
             <a:avLst/>
@@ -12663,14 +12143,164 @@
                 <a:ea typeface="Pretendard"/>
                 <a:cs typeface="Pretendard"/>
               </a:rPr>
-              <a:t>S3 API 주소 (MinIO)</a:t>
-            </a:r>
-          </a:p>
-        </p:txBody>
-      </p:sp>
-      <p:sp>
-        <p:nvSpPr>
-          <p:cNvPr id="32" name="TextBox 31"/>
+              <a:t>이미지 기본값 — REST 카탈로그가 정함</a:t>
+            </a:r>
+          </a:p>
+        </p:txBody>
+      </p:sp>
+      <p:sp>
+        <p:nvSpPr>
+          <p:cNvPr id="32" name="Rounded Rectangle 31"/>
+          <p:cNvSpPr/>
+          <p:nvPr/>
+        </p:nvSpPr>
+        <p:spPr>
+          <a:xfrm>
+            <a:off x="1143000" y="6924675"/>
+            <a:ext cx="8282940" cy="619125"/>
+          </a:xfrm>
+          <a:prstGeom prst="roundRect">
+            <a:avLst>
+              <a:gd name="adj" fmla="val 6153"/>
+            </a:avLst>
+          </a:prstGeom>
+          <a:solidFill>
+            <a:srgbClr val="EDF3FD"/>
+          </a:solidFill>
+          <a:ln w="9525">
+            <a:solidFill>
+              <a:srgbClr val="BFD3F5"/>
+            </a:solidFill>
+          </a:ln>
+          <a:effectLst/>
+        </p:spPr>
+        <p:txBody>
+          <a:bodyPr rtlCol="0" anchor="ctr" wrap="square"/>
+          <a:lstStyle/>
+          <a:p>
+            <a:pPr algn="ctr"/>
+          </a:p>
+        </p:txBody>
+      </p:sp>
+      <p:sp>
+        <p:nvSpPr>
+          <p:cNvPr id="33" name="TextBox 32"/>
+          <p:cNvSpPr txBox="1"/>
+          <p:nvPr/>
+        </p:nvSpPr>
+        <p:spPr>
+          <a:xfrm>
+            <a:off x="1238250" y="6924675"/>
+            <a:ext cx="8092440" cy="619125"/>
+          </a:xfrm>
+          <a:prstGeom prst="rect">
+            <a:avLst/>
+          </a:prstGeom>
+          <a:noFill/>
+        </p:spPr>
+        <p:txBody>
+          <a:bodyPr wrap="square" lIns="0" rIns="0" tIns="0" bIns="0" anchor="ctr">
+            <a:spAutoFit/>
+          </a:bodyPr>
+          <a:lstStyle/>
+          <a:p>
+            <a:pPr algn="l">
+              <a:lnSpc>
+                <a:spcPct val="115000"/>
+              </a:lnSpc>
+            </a:pPr>
+            <a:r>
+              <a:rPr sz="1875" b="1">
+                <a:solidFill>
+                  <a:srgbClr val="0D2B5E"/>
+                </a:solidFill>
+                <a:latin typeface="Pretendard"/>
+                <a:ea typeface="Pretendard"/>
+                <a:cs typeface="Pretendard"/>
+              </a:rPr>
+              <a:t>spark.sql.defaultCatalog demo</a:t>
+            </a:r>
+          </a:p>
+        </p:txBody>
+      </p:sp>
+      <p:sp>
+        <p:nvSpPr>
+          <p:cNvPr id="34" name="Rounded Rectangle 33"/>
+          <p:cNvSpPr/>
+          <p:nvPr/>
+        </p:nvSpPr>
+        <p:spPr>
+          <a:xfrm>
+            <a:off x="9464040" y="6924675"/>
+            <a:ext cx="7680960" cy="619125"/>
+          </a:xfrm>
+          <a:prstGeom prst="roundRect">
+            <a:avLst>
+              <a:gd name="adj" fmla="val 6153"/>
+            </a:avLst>
+          </a:prstGeom>
+          <a:solidFill>
+            <a:srgbClr val="FAFBFD"/>
+          </a:solidFill>
+          <a:ln w="9525">
+            <a:solidFill>
+              <a:srgbClr val="DCE1E8"/>
+            </a:solidFill>
+          </a:ln>
+          <a:effectLst/>
+        </p:spPr>
+        <p:txBody>
+          <a:bodyPr rtlCol="0" anchor="ctr" wrap="square"/>
+          <a:lstStyle/>
+          <a:p>
+            <a:pPr algn="ctr"/>
+          </a:p>
+        </p:txBody>
+      </p:sp>
+      <p:sp>
+        <p:nvSpPr>
+          <p:cNvPr id="35" name="TextBox 34"/>
+          <p:cNvSpPr txBox="1"/>
+          <p:nvPr/>
+        </p:nvSpPr>
+        <p:spPr>
+          <a:xfrm>
+            <a:off x="9559290" y="6924675"/>
+            <a:ext cx="7490460" cy="619125"/>
+          </a:xfrm>
+          <a:prstGeom prst="rect">
+            <a:avLst/>
+          </a:prstGeom>
+          <a:noFill/>
+        </p:spPr>
+        <p:txBody>
+          <a:bodyPr wrap="square" lIns="0" rIns="0" tIns="0" bIns="0" anchor="ctr">
+            <a:spAutoFit/>
+          </a:bodyPr>
+          <a:lstStyle/>
+          <a:p>
+            <a:pPr algn="ctr">
+              <a:lnSpc>
+                <a:spcPct val="115000"/>
+              </a:lnSpc>
+            </a:pPr>
+            <a:r>
+              <a:rPr sz="1875" b="0">
+                <a:solidFill>
+                  <a:srgbClr val="3D3D3D"/>
+                </a:solidFill>
+                <a:latin typeface="Pretendard"/>
+                <a:ea typeface="Pretendard"/>
+                <a:cs typeface="Pretendard"/>
+              </a:rPr>
+              <a:t>이름을 빼면 demo 로 본다</a:t>
+            </a:r>
+          </a:p>
+        </p:txBody>
+      </p:sp>
+      <p:sp>
+        <p:nvSpPr>
+          <p:cNvPr id="36" name="TextBox 35"/>
           <p:cNvSpPr txBox="1"/>
           <p:nvPr/>
         </p:nvSpPr>
@@ -12704,14 +12334,14 @@
                 <a:ea typeface="Pretendard"/>
                 <a:cs typeface="Pretendard"/>
               </a:rPr>
-              <a:t>grep -i -E "catalog|s3|iceberg" 로 읽는다 — 컨테이너끼리 서비스 이름(rest · minio)으로 통신하는 1-5 의 규칙 그대로</a:t>
-            </a:r>
-          </a:p>
-        </p:txBody>
-      </p:sp>
-      <p:sp>
-        <p:nvSpPr>
-          <p:cNvPr id="33" name="Rectangle 32"/>
+              <a:t>실제 자리는 REST 카탈로그(warehouse=s3://warehouse/)가 정한다 — 파일은 warehouse/lakehouse/orders/</a:t>
+            </a:r>
+          </a:p>
+        </p:txBody>
+      </p:sp>
+      <p:sp>
+        <p:nvSpPr>
+          <p:cNvPr id="37" name="Rectangle 36"/>
           <p:cNvSpPr/>
           <p:nvPr/>
         </p:nvSpPr>
@@ -12741,7 +12371,7 @@
       </p:sp>
       <p:sp>
         <p:nvSpPr>
-          <p:cNvPr id="34" name="TextBox 33"/>
+          <p:cNvPr id="38" name="TextBox 37"/>
           <p:cNvSpPr txBox="1"/>
           <p:nvPr/>
         </p:nvSpPr>
@@ -12782,7 +12412,7 @@
       </p:sp>
       <p:sp>
         <p:nvSpPr>
-          <p:cNvPr id="35" name="TextBox 34"/>
+          <p:cNvPr id="39" name="TextBox 38"/>
           <p:cNvSpPr txBox="1"/>
           <p:nvPr/>
         </p:nvSpPr>
@@ -13223,7 +12853,7 @@
                 <a:ea typeface="Pretendard"/>
                 <a:cs typeface="Pretendard"/>
               </a:rPr>
-              <a:t>프롬프트가 뜨기까지 30초 안팎 — 여러 번 실행하지 않는다</a:t>
+              <a:t>WARN 몇 줄 뒤 spark-sql ()&gt; 프롬프트 — 실측 6초</a:t>
             </a:r>
           </a:p>
         </p:txBody>
@@ -13410,7 +13040,7 @@
                 <a:ea typeface="Pretendard"/>
                 <a:cs typeface="Pretendard"/>
               </a:rPr>
-              <a:t>demo 가 보이면 연결 성공</a:t>
+              <a:t>demo · spark_catalog 두 줄이면 연결 성공</a:t>
             </a:r>
           </a:p>
         </p:txBody>
@@ -13597,7 +13227,7 @@
                 <a:ea typeface="Pretendard"/>
                 <a:cs typeface="Pretendard"/>
               </a:rPr>
-              <a:t>아직 비어 있다 — 다음 실습에서 채운다</a:t>
+              <a:t>결과 줄 없이 Time taken 만 — 다음 실습에서 채운다</a:t>
             </a:r>
           </a:p>
         </p:txBody>
@@ -13859,7 +13489,7 @@
                 <a:ea typeface="Pretendard"/>
                 <a:cs typeface="Pretendard"/>
               </a:rPr>
-              <a:t>메모리</a:t>
+              <a:t>4041 줄</a:t>
             </a:r>
           </a:p>
         </p:txBody>
@@ -13900,7 +13530,7 @@
                 <a:ea typeface="Pretendard"/>
                 <a:cs typeface="Pretendard"/>
               </a:rPr>
-              <a:t>Docker 에</a:t>
+              <a:t>다른 Spark 가</a:t>
             </a:r>
           </a:p>
           <a:p>
@@ -13918,7 +13548,7 @@
                 <a:ea typeface="Pretendard"/>
                 <a:cs typeface="Pretendard"/>
               </a:rPr>
-              <a:t>8GB 이상</a:t>
+              <a:t>4040 — 무시</a:t>
             </a:r>
           </a:p>
         </p:txBody>
@@ -14291,7 +13921,7 @@
                 <a:ea typeface="Pretendard"/>
                 <a:cs typeface="Pretendard"/>
               </a:rPr>
-              <a:t>「rest:8181 connection refused」를 직접 겪어 두면 나중에 원인을 바로 좁힐 수 있습니다</a:t>
+              <a:t>Spark 는 테이블 목록을 스스로 갖지 않고 매번 카탈로그에 묻습니다 — spark-sql 은 quit; 으로 나온 뒤</a:t>
             </a:r>
           </a:p>
         </p:txBody>
@@ -14601,7 +14231,7 @@
                 <a:ea typeface="Pretendard"/>
                 <a:cs typeface="Pretendard"/>
               </a:rPr>
-              <a:t>SHOW DATABASES</a:t>
+              <a:t>spark-sql -e</a:t>
             </a:r>
           </a:p>
           <a:p>
@@ -14619,7 +14249,7 @@
                 <a:ea typeface="Pretendard"/>
                 <a:cs typeface="Pretendard"/>
               </a:rPr>
-              <a:t>IN demo;</a:t>
+              <a:t>| grep Exception</a:t>
             </a:r>
           </a:p>
         </p:txBody>
@@ -14765,7 +14395,7 @@
                 <a:ea typeface="Pretendard"/>
                 <a:cs typeface="Pretendard"/>
               </a:rPr>
-              <a:t>rest:8181</a:t>
+              <a:t>UnknownHost</a:t>
             </a:r>
           </a:p>
           <a:p>
@@ -14783,7 +14413,7 @@
                 <a:ea typeface="Pretendard"/>
                 <a:cs typeface="Pretendard"/>
               </a:rPr>
-              <a:t>connection refused</a:t>
+              <a:t>Exception: rest</a:t>
             </a:r>
           </a:p>
         </p:txBody>
@@ -14888,7 +14518,7 @@
                 <a:ea typeface="Pretendard"/>
                 <a:cs typeface="Pretendard"/>
               </a:rPr>
-              <a:t>원인 찾기</a:t>
+              <a:t>왜 이름 오류</a:t>
             </a:r>
           </a:p>
         </p:txBody>
@@ -14929,7 +14559,7 @@
                 <a:ea typeface="Pretendard"/>
                 <a:cs typeface="Pretendard"/>
               </a:rPr>
-              <a:t>compose ps ·</a:t>
+              <a:t>멈춘 컨테이너는</a:t>
             </a:r>
           </a:p>
           <a:p>
@@ -14947,7 +14577,7 @@
                 <a:ea typeface="Pretendard"/>
                 <a:cs typeface="Pretendard"/>
               </a:rPr>
-              <a:t>logs rest</a:t>
+              <a:t>이름표에서 빠짐</a:t>
             </a:r>
           </a:p>
         </p:txBody>
@@ -15093,7 +14723,7 @@
                 <a:ea typeface="Pretendard"/>
                 <a:cs typeface="Pretendard"/>
               </a:rPr>
-              <a:t>compose up -d</a:t>
+              <a:t>compose start rest</a:t>
             </a:r>
           </a:p>
           <a:p>
